--- a/public/example-lecture.pptx
+++ b/public/example-lecture.pptx
@@ -10,14 +10,12 @@
     <p:sldId id="258" r:id="rId4"/>
     <p:sldId id="259" r:id="rId5"/>
     <p:sldId id="260" r:id="rId6"/>
-    <p:sldId id="261" r:id="rId7"/>
-    <p:sldId id="262" r:id="rId8"/>
   </p:sldIdLst>
   <p:notesMasterIdLst>
-    <p:notesMasterId r:id="rId9"/>
+    <p:notesMasterId r:id="rId7"/>
   </p:notesMasterIdLst>
-  <p:sldSz cx="12192000" cy="6858000"/>
-  <p:notesSz cx="6858000" cy="12192000"/>
+  <p:sldSz cx="9144000" cy="5143500"/>
+  <p:notesSz cx="5143500" cy="9144000"/>
   <p:defaultTextStyle>
     <a:lvl1pPr marL="0" algn="l" defTabSz="914400" rtl="0" eaLnBrk="1" latinLnBrk="0" hangingPunct="1">
       <a:defRPr sz="1800" kern="1200">
@@ -508,7 +506,7 @@
           <a:p>
             <a:r>
               <a:rPr lang="en-US" dirty="0"/>
-              <a:t/>
+              <a:t>도입 인사 후 성취기준 두 가지를 먼저 짚어 주고 시작합니다.</a:t>
             </a:r>
             <a:endParaRPr lang="en-US" dirty="0"/>
           </a:p>
@@ -684,7 +682,7 @@
           <a:p>
             <a:r>
               <a:rPr lang="en-US" dirty="0"/>
-              <a:t/>
+              <a:t>학생들에게 직접 소리를 내 보게 한 뒤, 그 소리를 '숫자'로 남기는 방법을 상상하게 합니다.</a:t>
             </a:r>
             <a:endParaRPr lang="en-US" dirty="0"/>
           </a:p>
@@ -772,7 +770,7 @@
           <a:p>
             <a:r>
               <a:rPr lang="en-US" dirty="0"/>
-              <a:t/>
+              <a:t>영상 시청 후 '샘플링'을 손뼉으로 시연: 일정 박자로 값을 찍어 기록한다는 개념을 몸으로 익힙니다. 자료 출처: 소프트웨어 교육 포털(sai.software.kr).</a:t>
             </a:r>
             <a:endParaRPr lang="en-US" dirty="0"/>
           </a:p>
@@ -860,7 +858,7 @@
           <a:p>
             <a:r>
               <a:rPr lang="en-US" dirty="0"/>
-              <a:t/>
+              <a:t>성취기준 두 가지를 학생 언어로 다시 말해 주며 수업을 닫습니다.</a:t>
             </a:r>
             <a:endParaRPr lang="en-US" dirty="0"/>
           </a:p>
@@ -884,182 +882,6 @@
             <a:fld id="{F7021451-1387-4CA6-816F-3879F97B5CBC}" type="slidenum">
               <a:rPr lang="en-US"/>
               <a:t>5</a:t>
-            </a:fld>
-            <a:endParaRPr lang="en-US"/>
-          </a:p>
-        </p:txBody>
-      </p:sp>
-    </p:spTree>
-    <p:extLst>
-      <p:ext uri="{BB962C8B-B14F-4D97-AF65-F5344CB8AC3E}">
-        <p14:creationId xmlns:p14="http://schemas.microsoft.com/office/powerpoint/2010/main" val="1024086991"/>
-      </p:ext>
-    </p:extLst>
-  </p:cSld>
-  <p:clrMapOvr>
-    <a:masterClrMapping/>
-  </p:clrMapOvr>
-</p:notes>
-</file>
-
-<file path=ppt/notesSlides/notesSlide6.xml><?xml version="1.0" encoding="utf-8"?>
-<p:notes xmlns:a="http://schemas.openxmlformats.org/drawingml/2006/main" xmlns:r="http://schemas.openxmlformats.org/officeDocument/2006/relationships" xmlns:p="http://schemas.openxmlformats.org/presentationml/2006/main">
-  <p:cSld>
-    <p:spTree>
-      <p:nvGrpSpPr>
-        <p:cNvPr id="1" name=""/>
-        <p:cNvGrpSpPr/>
-        <p:nvPr/>
-      </p:nvGrpSpPr>
-      <p:grpSpPr>
-        <a:xfrm>
-          <a:off x="0" y="0"/>
-          <a:ext cx="0" cy="0"/>
-          <a:chOff x="0" y="0"/>
-          <a:chExt cx="0" cy="0"/>
-        </a:xfrm>
-      </p:grpSpPr>
-      <p:sp>
-        <p:nvSpPr>
-          <p:cNvPr id="2" name="Slide Image Placeholder 1"/>
-          <p:cNvSpPr>
-            <a:spLocks noGrp="1" noRot="1" noChangeAspect="1"/>
-          </p:cNvSpPr>
-          <p:nvPr>
-            <p:ph type="sldImg"/>
-          </p:nvPr>
-        </p:nvSpPr>
-        <p:spPr/>
-      </p:sp>
-      <p:sp>
-        <p:nvSpPr>
-          <p:cNvPr id="3" name="Notes Placeholder 2"/>
-          <p:cNvSpPr>
-            <a:spLocks noGrp="1"/>
-          </p:cNvSpPr>
-          <p:nvPr>
-            <p:ph type="body" idx="1"/>
-          </p:nvPr>
-        </p:nvSpPr>
-        <p:spPr/>
-        <p:txBody>
-          <a:bodyPr/>
-          <a:lstStyle/>
-          <a:p>
-            <a:r>
-              <a:rPr lang="en-US" dirty="0"/>
-              <a:t/>
-            </a:r>
-            <a:endParaRPr lang="en-US" dirty="0"/>
-          </a:p>
-        </p:txBody>
-      </p:sp>
-      <p:sp>
-        <p:nvSpPr>
-          <p:cNvPr id="4" name="Slide Number Placeholder 3"/>
-          <p:cNvSpPr>
-            <a:spLocks noGrp="1"/>
-          </p:cNvSpPr>
-          <p:nvPr>
-            <p:ph type="sldNum" sz="quarter" idx="10"/>
-          </p:nvPr>
-        </p:nvSpPr>
-        <p:spPr/>
-        <p:txBody>
-          <a:bodyPr/>
-          <a:lstStyle/>
-          <a:p>
-            <a:fld id="{F7021451-1387-4CA6-816F-3879F97B5CBC}" type="slidenum">
-              <a:rPr lang="en-US"/>
-              <a:t>6</a:t>
-            </a:fld>
-            <a:endParaRPr lang="en-US"/>
-          </a:p>
-        </p:txBody>
-      </p:sp>
-    </p:spTree>
-    <p:extLst>
-      <p:ext uri="{BB962C8B-B14F-4D97-AF65-F5344CB8AC3E}">
-        <p14:creationId xmlns:p14="http://schemas.microsoft.com/office/powerpoint/2010/main" val="1024086991"/>
-      </p:ext>
-    </p:extLst>
-  </p:cSld>
-  <p:clrMapOvr>
-    <a:masterClrMapping/>
-  </p:clrMapOvr>
-</p:notes>
-</file>
-
-<file path=ppt/notesSlides/notesSlide7.xml><?xml version="1.0" encoding="utf-8"?>
-<p:notes xmlns:a="http://schemas.openxmlformats.org/drawingml/2006/main" xmlns:r="http://schemas.openxmlformats.org/officeDocument/2006/relationships" xmlns:p="http://schemas.openxmlformats.org/presentationml/2006/main">
-  <p:cSld>
-    <p:spTree>
-      <p:nvGrpSpPr>
-        <p:cNvPr id="1" name=""/>
-        <p:cNvGrpSpPr/>
-        <p:nvPr/>
-      </p:nvGrpSpPr>
-      <p:grpSpPr>
-        <a:xfrm>
-          <a:off x="0" y="0"/>
-          <a:ext cx="0" cy="0"/>
-          <a:chOff x="0" y="0"/>
-          <a:chExt cx="0" cy="0"/>
-        </a:xfrm>
-      </p:grpSpPr>
-      <p:sp>
-        <p:nvSpPr>
-          <p:cNvPr id="2" name="Slide Image Placeholder 1"/>
-          <p:cNvSpPr>
-            <a:spLocks noGrp="1" noRot="1" noChangeAspect="1"/>
-          </p:cNvSpPr>
-          <p:nvPr>
-            <p:ph type="sldImg"/>
-          </p:nvPr>
-        </p:nvSpPr>
-        <p:spPr/>
-      </p:sp>
-      <p:sp>
-        <p:nvSpPr>
-          <p:cNvPr id="3" name="Notes Placeholder 2"/>
-          <p:cNvSpPr>
-            <a:spLocks noGrp="1"/>
-          </p:cNvSpPr>
-          <p:nvPr>
-            <p:ph type="body" idx="1"/>
-          </p:nvPr>
-        </p:nvSpPr>
-        <p:spPr/>
-        <p:txBody>
-          <a:bodyPr/>
-          <a:lstStyle/>
-          <a:p>
-            <a:r>
-              <a:rPr lang="en-US" dirty="0"/>
-              <a:t/>
-            </a:r>
-            <a:endParaRPr lang="en-US" dirty="0"/>
-          </a:p>
-        </p:txBody>
-      </p:sp>
-      <p:sp>
-        <p:nvSpPr>
-          <p:cNvPr id="4" name="Slide Number Placeholder 3"/>
-          <p:cNvSpPr>
-            <a:spLocks noGrp="1"/>
-          </p:cNvSpPr>
-          <p:nvPr>
-            <p:ph type="sldNum" sz="quarter" idx="10"/>
-          </p:nvPr>
-        </p:nvSpPr>
-        <p:spPr/>
-        <p:txBody>
-          <a:bodyPr/>
-          <a:lstStyle/>
-          <a:p>
-            <a:fld id="{F7021451-1387-4CA6-816F-3879F97B5CBC}" type="slidenum">
-              <a:rPr lang="en-US"/>
-              <a:t>7</a:t>
             </a:fld>
             <a:endParaRPr lang="en-US"/>
           </a:p>
@@ -1388,6 +1210,13 @@
 <file path=ppt/slides/slide1.xml><?xml version="1.0" encoding="utf-8"?>
 <p:sld xmlns:a="http://schemas.openxmlformats.org/drawingml/2006/main" xmlns:r="http://schemas.openxmlformats.org/officeDocument/2006/relationships" xmlns:p="http://schemas.openxmlformats.org/presentationml/2006/main">
   <p:cSld name="Slide 1">
+    <p:bg>
+      <p:bgPr>
+        <a:solidFill>
+          <a:srgbClr val="241C4D"/>
+        </a:solidFill>
+      </p:bgPr>
+    </p:bg>
     <p:spTree>
       <p:nvGrpSpPr>
         <p:cNvPr id="1" name=""/>
@@ -1404,14 +1233,54 @@
       </p:grpSpPr>
       <p:sp>
         <p:nvSpPr>
-          <p:cNvPr id="2" name="Text 0"/>
-          <p:cNvSpPr/>
-          <p:nvPr/>
-        </p:nvSpPr>
-        <p:spPr>
-          <a:xfrm>
-            <a:off x="548640" y="1737360"/>
-            <a:ext cx="11091672" cy="1280160"/>
+          <p:cNvPr id="2" name="Shape 0"/>
+          <p:cNvSpPr/>
+          <p:nvPr/>
+        </p:nvSpPr>
+        <p:spPr>
+          <a:xfrm>
+            <a:off x="6858000" y="-1005840"/>
+            <a:ext cx="3291840" cy="3291840"/>
+          </a:xfrm>
+          <a:prstGeom prst="ellipse">
+            <a:avLst/>
+          </a:prstGeom>
+          <a:solidFill>
+            <a:srgbClr val="4A3F9E"/>
+          </a:solidFill>
+          <a:ln/>
+        </p:spPr>
+      </p:sp>
+      <p:sp>
+        <p:nvSpPr>
+          <p:cNvPr id="3" name="Shape 1"/>
+          <p:cNvSpPr/>
+          <p:nvPr/>
+        </p:nvSpPr>
+        <p:spPr>
+          <a:xfrm>
+            <a:off x="8138160" y="3291840"/>
+            <a:ext cx="2194560" cy="2194560"/>
+          </a:xfrm>
+          <a:prstGeom prst="ellipse">
+            <a:avLst/>
+          </a:prstGeom>
+          <a:solidFill>
+            <a:srgbClr val="4A3F9E"/>
+          </a:solidFill>
+          <a:ln/>
+        </p:spPr>
+      </p:sp>
+      <p:sp>
+        <p:nvSpPr>
+          <p:cNvPr id="4" name="Text 2"/>
+          <p:cNvSpPr/>
+          <p:nvPr/>
+        </p:nvSpPr>
+        <p:spPr>
+          <a:xfrm>
+            <a:off x="731520" y="1051560"/>
+            <a:ext cx="6858000" cy="365760"/>
           </a:xfrm>
           <a:prstGeom prst="rect">
             <a:avLst/>
@@ -1420,34 +1289,37 @@
           <a:ln/>
         </p:spPr>
         <p:txBody>
-          <a:bodyPr wrap="square" rtlCol="0" anchor="ctr"/>
-          <a:lstStyle/>
-          <a:p>
-            <a:pPr algn="ctr" indent="0" marL="0">
+          <a:bodyPr wrap="square" lIns="0" tIns="0" rIns="0" bIns="0" rtlCol="0" anchor="ctr"/>
+          <a:lstStyle/>
+          <a:p>
+            <a:pPr indent="0" marL="0">
               <a:buNone/>
             </a:pPr>
             <a:r>
-              <a:rPr lang="en-US" sz="4000" b="1" dirty="0">
-                <a:solidFill>
-                  <a:srgbClr val="000000"/>
-                </a:solidFill>
-              </a:rPr>
-              <a:t>중학교 국어 읽기 수업: 어휘 파악에서 의미 해석까지</a:t>
-            </a:r>
-            <a:endParaRPr lang="en-US" sz="4000" dirty="0"/>
-          </a:p>
-        </p:txBody>
-      </p:sp>
-      <p:sp>
-        <p:nvSpPr>
-          <p:cNvPr id="3" name="Text 1"/>
-          <p:cNvSpPr/>
-          <p:nvPr/>
-        </p:nvSpPr>
-        <p:spPr>
-          <a:xfrm>
-            <a:off x="548640" y="3108960"/>
-            <a:ext cx="11091672" cy="731520"/>
+              <a:rPr lang="en-US" sz="1500" b="1" dirty="0">
+                <a:solidFill>
+                  <a:srgbClr val="F5B400"/>
+                </a:solidFill>
+                <a:latin typeface="맑은 고딕" pitchFamily="34" charset="0"/>
+                <a:ea typeface="맑은 고딕" pitchFamily="34" charset="-122"/>
+                <a:cs typeface="맑은 고딕" pitchFamily="34" charset="-120"/>
+              </a:rPr>
+              <a:t>중학교 정보 · AI 소리인식 수업</a:t>
+            </a:r>
+            <a:endParaRPr lang="en-US" sz="1500" dirty="0"/>
+          </a:p>
+        </p:txBody>
+      </p:sp>
+      <p:sp>
+        <p:nvSpPr>
+          <p:cNvPr id="5" name="Text 3"/>
+          <p:cNvSpPr/>
+          <p:nvPr/>
+        </p:nvSpPr>
+        <p:spPr>
+          <a:xfrm>
+            <a:off x="731520" y="1481328"/>
+            <a:ext cx="6949440" cy="1005840"/>
           </a:xfrm>
           <a:prstGeom prst="rect">
             <a:avLst/>
@@ -1456,47 +1328,141 @@
           <a:ln/>
         </p:spPr>
         <p:txBody>
-          <a:bodyPr wrap="square" rtlCol="0" anchor="ctr"/>
-          <a:lstStyle/>
-          <a:p>
-            <a:pPr algn="ctr" indent="0" marL="0">
+          <a:bodyPr wrap="square" lIns="0" tIns="0" rIns="0" bIns="0" rtlCol="0" anchor="ctr"/>
+          <a:lstStyle/>
+          <a:p>
+            <a:pPr indent="0" marL="0">
               <a:buNone/>
             </a:pPr>
             <a:r>
-              <a:rPr lang="en-US" sz="2000" dirty="0">
-                <a:solidFill>
-                  <a:srgbClr val="666666"/>
-                </a:solidFill>
-              </a:rPr>
-              <a:t>성취기준 9국02-03, 9국02-04 연계 독서 활동</a:t>
-            </a:r>
-            <a:endParaRPr lang="en-US" sz="2000" dirty="0"/>
-          </a:p>
-        </p:txBody>
-      </p:sp>
-      <p:pic>
-        <p:nvPicPr>
-          <p:cNvPr id="4" name="Image 0" descr="preencoded.png">    </p:cNvPr>
-          <p:cNvPicPr>
-            <a:picLocks noChangeAspect="1"/>
-          </p:cNvPicPr>
-          <p:nvPr/>
-        </p:nvPicPr>
-        <p:blipFill>
-          <a:blip r:embed="rId1"/>
-          <a:srcRect l="0" r="0" t="0" b="0"/>
-          <a:stretch/>
-        </p:blipFill>
-        <p:spPr>
-          <a:xfrm>
-            <a:off x="3355848" y="4023360"/>
-            <a:ext cx="5486400" cy="2468880"/>
-          </a:xfrm>
-          <a:prstGeom prst="rect">
-            <a:avLst/>
-          </a:prstGeom>
-        </p:spPr>
-      </p:pic>
+              <a:rPr lang="en-US" sz="4400" b="1" dirty="0">
+                <a:solidFill>
+                  <a:srgbClr val="FFFFFF"/>
+                </a:solidFill>
+                <a:latin typeface="맑은 고딕" pitchFamily="34" charset="0"/>
+                <a:ea typeface="맑은 고딕" pitchFamily="34" charset="-122"/>
+                <a:cs typeface="맑은 고딕" pitchFamily="34" charset="-120"/>
+              </a:rPr>
+              <a:t>S.O.S 세계수를 구하라</a:t>
+            </a:r>
+            <a:endParaRPr lang="en-US" sz="4400" dirty="0"/>
+          </a:p>
+        </p:txBody>
+      </p:sp>
+      <p:sp>
+        <p:nvSpPr>
+          <p:cNvPr id="6" name="Text 4"/>
+          <p:cNvSpPr/>
+          <p:nvPr/>
+        </p:nvSpPr>
+        <p:spPr>
+          <a:xfrm>
+            <a:off x="731520" y="2514600"/>
+            <a:ext cx="6949440" cy="457200"/>
+          </a:xfrm>
+          <a:prstGeom prst="rect">
+            <a:avLst/>
+          </a:prstGeom>
+          <a:noFill/>
+          <a:ln/>
+        </p:spPr>
+        <p:txBody>
+          <a:bodyPr wrap="square" lIns="0" tIns="0" rIns="0" bIns="0" rtlCol="0" anchor="ctr"/>
+          <a:lstStyle/>
+          <a:p>
+            <a:pPr indent="0" marL="0">
+              <a:buNone/>
+            </a:pPr>
+            <a:r>
+              <a:rPr lang="en-US" sz="1700" dirty="0">
+                <a:solidFill>
+                  <a:srgbClr val="D8D3F2"/>
+                </a:solidFill>
+                <a:latin typeface="맑은 고딕" pitchFamily="34" charset="0"/>
+                <a:ea typeface="맑은 고딕" pitchFamily="34" charset="-122"/>
+                <a:cs typeface="맑은 고딕" pitchFamily="34" charset="-120"/>
+              </a:rPr>
+              <a:t>소리는 어떻게 데이터가 되는가 — 디지털 표현과 AI 학습 데이터</a:t>
+            </a:r>
+            <a:endParaRPr lang="en-US" sz="1700" dirty="0"/>
+          </a:p>
+        </p:txBody>
+      </p:sp>
+      <p:sp>
+        <p:nvSpPr>
+          <p:cNvPr id="7" name="Shape 5"/>
+          <p:cNvSpPr/>
+          <p:nvPr/>
+        </p:nvSpPr>
+        <p:spPr>
+          <a:xfrm>
+            <a:off x="731520" y="3246120"/>
+            <a:ext cx="6583680" cy="960120"/>
+          </a:xfrm>
+          <a:prstGeom prst="roundRect">
+            <a:avLst>
+              <a:gd name="adj" fmla="val 11429"/>
+            </a:avLst>
+          </a:prstGeom>
+          <a:solidFill>
+            <a:srgbClr val="332A63"/>
+          </a:solidFill>
+          <a:ln/>
+        </p:spPr>
+      </p:sp>
+      <p:sp>
+        <p:nvSpPr>
+          <p:cNvPr id="8" name="Text 6"/>
+          <p:cNvSpPr/>
+          <p:nvPr/>
+        </p:nvSpPr>
+        <p:spPr>
+          <a:xfrm>
+            <a:off x="960120" y="3401568"/>
+            <a:ext cx="6126480" cy="640080"/>
+          </a:xfrm>
+          <a:prstGeom prst="rect">
+            <a:avLst/>
+          </a:prstGeom>
+          <a:noFill/>
+          <a:ln/>
+        </p:spPr>
+        <p:txBody>
+          <a:bodyPr wrap="square" lIns="0" tIns="0" rIns="0" bIns="0" rtlCol="0" anchor="ctr"/>
+          <a:lstStyle/>
+          <a:p>
+            <a:pPr indent="0" marL="0">
+              <a:buNone/>
+            </a:pPr>
+            <a:r>
+              <a:rPr lang="en-US" sz="1350" b="1" dirty="0">
+                <a:solidFill>
+                  <a:srgbClr val="F5B400"/>
+                </a:solidFill>
+                <a:latin typeface="맑은 고딕" pitchFamily="34" charset="0"/>
+                <a:ea typeface="맑은 고딕" pitchFamily="34" charset="-122"/>
+                <a:cs typeface="맑은 고딕" pitchFamily="34" charset="-120"/>
+              </a:rPr>
+              <a:t>성취기준  </a:t>
+            </a:r>
+            <a:pPr indent="0" marL="0">
+              <a:buNone/>
+            </a:pPr>
+            <a:r>
+              <a:rPr lang="en-US" sz="1350" dirty="0">
+                <a:solidFill>
+                  <a:srgbClr val="E6E2F7"/>
+                </a:solidFill>
+                <a:latin typeface="맑은 고딕" pitchFamily="34" charset="0"/>
+                <a:ea typeface="맑은 고딕" pitchFamily="34" charset="-122"/>
+                <a:cs typeface="맑은 고딕" pitchFamily="34" charset="-120"/>
+              </a:rPr>
+              <a:t>9정02-01 실생활 데이터의 디지털 표현  ·  9정04-02 AI 학습 데이터의 수집과 분류</a:t>
+            </a:r>
+            <a:endParaRPr lang="en-US" sz="1350" dirty="0"/>
+          </a:p>
+        </p:txBody>
+      </p:sp>
     </p:spTree>
   </p:cSld>
   <p:clrMapOvr>
@@ -1530,8 +1496,8 @@
         </p:nvSpPr>
         <p:spPr>
           <a:xfrm>
-            <a:off x="457200" y="320040"/>
-            <a:ext cx="11274552" cy="822960"/>
+            <a:off x="548640" y="347472"/>
+            <a:ext cx="8046720" cy="640080"/>
           </a:xfrm>
           <a:prstGeom prst="rect">
             <a:avLst/>
@@ -1540,34 +1506,157 @@
           <a:ln/>
         </p:spPr>
         <p:txBody>
-          <a:bodyPr wrap="square" rtlCol="0" anchor="ctr"/>
+          <a:bodyPr wrap="square" lIns="0" tIns="0" rIns="0" bIns="0" rtlCol="0" anchor="ctr"/>
+          <a:lstStyle/>
+          <a:p>
+            <a:pPr algn="l" indent="0" marL="0">
+              <a:buNone/>
+            </a:pPr>
+            <a:r>
+              <a:rPr lang="en-US" sz="3000" b="1" dirty="0">
+                <a:solidFill>
+                  <a:srgbClr val="241C4D"/>
+                </a:solidFill>
+                <a:latin typeface="맑은 고딕" pitchFamily="34" charset="0"/>
+                <a:ea typeface="맑은 고딕" pitchFamily="34" charset="-122"/>
+                <a:cs typeface="맑은 고딕" pitchFamily="34" charset="-120"/>
+              </a:rPr>
+              <a:t>목차</a:t>
+            </a:r>
+            <a:endParaRPr lang="en-US" sz="3000" dirty="0"/>
+          </a:p>
+        </p:txBody>
+      </p:sp>
+      <p:sp>
+        <p:nvSpPr>
+          <p:cNvPr id="3" name="Shape 1"/>
+          <p:cNvSpPr/>
+          <p:nvPr/>
+        </p:nvSpPr>
+        <p:spPr>
+          <a:xfrm>
+            <a:off x="548640" y="1325880"/>
+            <a:ext cx="8046720" cy="822960"/>
+          </a:xfrm>
+          <a:prstGeom prst="roundRect">
+            <a:avLst>
+              <a:gd name="adj" fmla="val 11111"/>
+            </a:avLst>
+          </a:prstGeom>
+          <a:solidFill>
+            <a:srgbClr val="EEEBFA"/>
+          </a:solidFill>
+          <a:ln/>
+        </p:spPr>
+      </p:sp>
+      <p:sp>
+        <p:nvSpPr>
+          <p:cNvPr id="4" name="Shape 2"/>
+          <p:cNvSpPr/>
+          <p:nvPr/>
+        </p:nvSpPr>
+        <p:spPr>
+          <a:xfrm>
+            <a:off x="777240" y="1499616"/>
+            <a:ext cx="475488" cy="475488"/>
+          </a:xfrm>
+          <a:prstGeom prst="ellipse">
+            <a:avLst/>
+          </a:prstGeom>
+          <a:solidFill>
+            <a:srgbClr val="4A3F9E"/>
+          </a:solidFill>
+          <a:ln/>
+        </p:spPr>
+      </p:sp>
+      <p:sp>
+        <p:nvSpPr>
+          <p:cNvPr id="5" name="Text 3"/>
+          <p:cNvSpPr/>
+          <p:nvPr/>
+        </p:nvSpPr>
+        <p:spPr>
+          <a:xfrm>
+            <a:off x="777240" y="1499616"/>
+            <a:ext cx="475488" cy="475488"/>
+          </a:xfrm>
+          <a:prstGeom prst="rect">
+            <a:avLst/>
+          </a:prstGeom>
+          <a:noFill/>
+          <a:ln/>
+        </p:spPr>
+        <p:txBody>
+          <a:bodyPr wrap="square" lIns="0" tIns="0" rIns="0" bIns="0" rtlCol="0" anchor="ctr"/>
+          <a:lstStyle/>
+          <a:p>
+            <a:pPr algn="ctr" indent="0" marL="0">
+              <a:buNone/>
+            </a:pPr>
+            <a:r>
+              <a:rPr lang="en-US" sz="1300" b="1" dirty="0">
+                <a:solidFill>
+                  <a:srgbClr val="FFFFFF"/>
+                </a:solidFill>
+                <a:latin typeface="맑은 고딕" pitchFamily="34" charset="0"/>
+                <a:ea typeface="맑은 고딕" pitchFamily="34" charset="-122"/>
+                <a:cs typeface="맑은 고딕" pitchFamily="34" charset="-120"/>
+              </a:rPr>
+              <a:t>01</a:t>
+            </a:r>
+            <a:endParaRPr lang="en-US" sz="1300" dirty="0"/>
+          </a:p>
+        </p:txBody>
+      </p:sp>
+      <p:sp>
+        <p:nvSpPr>
+          <p:cNvPr id="6" name="Text 4"/>
+          <p:cNvSpPr/>
+          <p:nvPr/>
+        </p:nvSpPr>
+        <p:spPr>
+          <a:xfrm>
+            <a:off x="1463040" y="1444752"/>
+            <a:ext cx="2103120" cy="292608"/>
+          </a:xfrm>
+          <a:prstGeom prst="rect">
+            <a:avLst/>
+          </a:prstGeom>
+          <a:noFill/>
+          <a:ln/>
+        </p:spPr>
+        <p:txBody>
+          <a:bodyPr wrap="square" lIns="0" tIns="0" rIns="0" bIns="0" rtlCol="0" anchor="ctr"/>
           <a:lstStyle/>
           <a:p>
             <a:pPr indent="0" marL="0">
               <a:buNone/>
             </a:pPr>
             <a:r>
-              <a:rPr lang="en-US" sz="2600" b="1" dirty="0">
-                <a:solidFill>
-                  <a:srgbClr val="D97706"/>
-                </a:solidFill>
-              </a:rPr>
-              <a:t>목차</a:t>
-            </a:r>
-            <a:endParaRPr lang="en-US" sz="2600" dirty="0"/>
-          </a:p>
-        </p:txBody>
-      </p:sp>
-      <p:sp>
-        <p:nvSpPr>
-          <p:cNvPr id="3" name="Text 1"/>
-          <p:cNvSpPr/>
-          <p:nvPr/>
-        </p:nvSpPr>
-        <p:spPr>
-          <a:xfrm>
-            <a:off x="822960" y="1554480"/>
-            <a:ext cx="10543032" cy="4572000"/>
+              <a:rPr lang="en-US" sz="1500" b="1" dirty="0">
+                <a:solidFill>
+                  <a:srgbClr val="241C4D"/>
+                </a:solidFill>
+                <a:latin typeface="맑은 고딕" pitchFamily="34" charset="0"/>
+                <a:ea typeface="맑은 고딕" pitchFamily="34" charset="-122"/>
+                <a:cs typeface="맑은 고딕" pitchFamily="34" charset="-120"/>
+              </a:rPr>
+              <a:t>동기유발</a:t>
+            </a:r>
+            <a:endParaRPr lang="en-US" sz="1500" dirty="0"/>
+          </a:p>
+        </p:txBody>
+      </p:sp>
+      <p:sp>
+        <p:nvSpPr>
+          <p:cNvPr id="7" name="Text 5"/>
+          <p:cNvSpPr/>
+          <p:nvPr/>
+        </p:nvSpPr>
+        <p:spPr>
+          <a:xfrm>
+            <a:off x="1463040" y="1746504"/>
+            <a:ext cx="6766560" cy="292608"/>
           </a:xfrm>
           <a:prstGeom prst="rect">
             <a:avLst/>
@@ -1576,92 +1665,342 @@
           <a:ln/>
         </p:spPr>
         <p:txBody>
-          <a:bodyPr wrap="square" rtlCol="0" anchor="ctr"/>
+          <a:bodyPr wrap="square" lIns="0" tIns="0" rIns="0" bIns="0" rtlCol="0" anchor="ctr"/>
           <a:lstStyle/>
           <a:p>
             <a:pPr indent="0" marL="0">
-              <a:lnSpc>
-                <a:spcPct val="130000"/>
-              </a:lnSpc>
               <a:buNone/>
             </a:pPr>
             <a:r>
-              <a:rPr lang="en-US" sz="2000" dirty="0">
-                <a:solidFill>
-                  <a:srgbClr val="000000"/>
-                </a:solidFill>
-              </a:rPr>
-              <a:t>1. 동기 유발: 글 읽기의 중요성과 탐구 목표</a:t>
-            </a:r>
-            <a:endParaRPr lang="en-US" sz="2000" dirty="0"/>
-          </a:p>
+              <a:rPr lang="en-US" sz="1250" dirty="0">
+                <a:solidFill>
+                  <a:srgbClr val="6E6A85"/>
+                </a:solidFill>
+                <a:latin typeface="맑은 고딕" pitchFamily="34" charset="0"/>
+                <a:ea typeface="맑은 고딕" pitchFamily="34" charset="-122"/>
+                <a:cs typeface="맑은 고딕" pitchFamily="34" charset="-120"/>
+              </a:rPr>
+              <a:t>게임 속 소리, 컴퓨터는 무엇을 듣고 있을까?</a:t>
+            </a:r>
+            <a:endParaRPr lang="en-US" sz="1250" dirty="0"/>
+          </a:p>
+        </p:txBody>
+      </p:sp>
+      <p:sp>
+        <p:nvSpPr>
+          <p:cNvPr id="8" name="Shape 6"/>
+          <p:cNvSpPr/>
+          <p:nvPr/>
+        </p:nvSpPr>
+        <p:spPr>
+          <a:xfrm>
+            <a:off x="548640" y="2313432"/>
+            <a:ext cx="8046720" cy="822960"/>
+          </a:xfrm>
+          <a:prstGeom prst="roundRect">
+            <a:avLst>
+              <a:gd name="adj" fmla="val 11111"/>
+            </a:avLst>
+          </a:prstGeom>
+          <a:solidFill>
+            <a:srgbClr val="EEEBFA"/>
+          </a:solidFill>
+          <a:ln/>
+        </p:spPr>
+      </p:sp>
+      <p:sp>
+        <p:nvSpPr>
+          <p:cNvPr id="9" name="Shape 7"/>
+          <p:cNvSpPr/>
+          <p:nvPr/>
+        </p:nvSpPr>
+        <p:spPr>
+          <a:xfrm>
+            <a:off x="777240" y="2487168"/>
+            <a:ext cx="475488" cy="475488"/>
+          </a:xfrm>
+          <a:prstGeom prst="ellipse">
+            <a:avLst/>
+          </a:prstGeom>
+          <a:solidFill>
+            <a:srgbClr val="4A3F9E"/>
+          </a:solidFill>
+          <a:ln/>
+        </p:spPr>
+      </p:sp>
+      <p:sp>
+        <p:nvSpPr>
+          <p:cNvPr id="10" name="Text 8"/>
+          <p:cNvSpPr/>
+          <p:nvPr/>
+        </p:nvSpPr>
+        <p:spPr>
+          <a:xfrm>
+            <a:off x="777240" y="2487168"/>
+            <a:ext cx="475488" cy="475488"/>
+          </a:xfrm>
+          <a:prstGeom prst="rect">
+            <a:avLst/>
+          </a:prstGeom>
+          <a:noFill/>
+          <a:ln/>
+        </p:spPr>
+        <p:txBody>
+          <a:bodyPr wrap="square" lIns="0" tIns="0" rIns="0" bIns="0" rtlCol="0" anchor="ctr"/>
+          <a:lstStyle/>
+          <a:p>
+            <a:pPr algn="ctr" indent="0" marL="0">
+              <a:buNone/>
+            </a:pPr>
+            <a:r>
+              <a:rPr lang="en-US" sz="1300" b="1" dirty="0">
+                <a:solidFill>
+                  <a:srgbClr val="FFFFFF"/>
+                </a:solidFill>
+                <a:latin typeface="맑은 고딕" pitchFamily="34" charset="0"/>
+                <a:ea typeface="맑은 고딕" pitchFamily="34" charset="-122"/>
+                <a:cs typeface="맑은 고딕" pitchFamily="34" charset="-120"/>
+              </a:rPr>
+              <a:t>02</a:t>
+            </a:r>
+            <a:endParaRPr lang="en-US" sz="1300" dirty="0"/>
+          </a:p>
+        </p:txBody>
+      </p:sp>
+      <p:sp>
+        <p:nvSpPr>
+          <p:cNvPr id="11" name="Text 9"/>
+          <p:cNvSpPr/>
+          <p:nvPr/>
+        </p:nvSpPr>
+        <p:spPr>
+          <a:xfrm>
+            <a:off x="1463040" y="2432304"/>
+            <a:ext cx="2103120" cy="292608"/>
+          </a:xfrm>
+          <a:prstGeom prst="rect">
+            <a:avLst/>
+          </a:prstGeom>
+          <a:noFill/>
+          <a:ln/>
+        </p:spPr>
+        <p:txBody>
+          <a:bodyPr wrap="square" lIns="0" tIns="0" rIns="0" bIns="0" rtlCol="0" anchor="ctr"/>
+          <a:lstStyle/>
           <a:p>
             <a:pPr indent="0" marL="0">
-              <a:lnSpc>
-                <a:spcPct val="130000"/>
-              </a:lnSpc>
               <a:buNone/>
             </a:pPr>
             <a:r>
-              <a:rPr lang="en-US" sz="2000" dirty="0">
-                <a:solidFill>
-                  <a:srgbClr val="000000"/>
-                </a:solidFill>
-              </a:rPr>
-              <a:t>2. 활동 1: 어휘 간의 의미 관계 파악하기</a:t>
-            </a:r>
-            <a:endParaRPr lang="en-US" sz="2000" dirty="0"/>
-          </a:p>
+              <a:rPr lang="en-US" sz="1500" b="1" dirty="0">
+                <a:solidFill>
+                  <a:srgbClr val="241C4D"/>
+                </a:solidFill>
+                <a:latin typeface="맑은 고딕" pitchFamily="34" charset="0"/>
+                <a:ea typeface="맑은 고딕" pitchFamily="34" charset="-122"/>
+                <a:cs typeface="맑은 고딕" pitchFamily="34" charset="-120"/>
+              </a:rPr>
+              <a:t>활동 [3-1]</a:t>
+            </a:r>
+            <a:endParaRPr lang="en-US" sz="1500" dirty="0"/>
+          </a:p>
+        </p:txBody>
+      </p:sp>
+      <p:sp>
+        <p:nvSpPr>
+          <p:cNvPr id="12" name="Text 10"/>
+          <p:cNvSpPr/>
+          <p:nvPr/>
+        </p:nvSpPr>
+        <p:spPr>
+          <a:xfrm>
+            <a:off x="1463040" y="2734056"/>
+            <a:ext cx="6766560" cy="292608"/>
+          </a:xfrm>
+          <a:prstGeom prst="rect">
+            <a:avLst/>
+          </a:prstGeom>
+          <a:noFill/>
+          <a:ln/>
+        </p:spPr>
+        <p:txBody>
+          <a:bodyPr wrap="square" lIns="0" tIns="0" rIns="0" bIns="0" rtlCol="0" anchor="ctr"/>
+          <a:lstStyle/>
           <a:p>
             <a:pPr indent="0" marL="0">
-              <a:lnSpc>
-                <a:spcPct val="130000"/>
-              </a:lnSpc>
               <a:buNone/>
             </a:pPr>
             <a:r>
-              <a:rPr lang="en-US" sz="2000" dirty="0">
-                <a:solidFill>
-                  <a:srgbClr val="000000"/>
-                </a:solidFill>
-              </a:rPr>
-              <a:t>3. 활동 2: 글의 정보 구조화 및 시각화</a:t>
-            </a:r>
-            <a:endParaRPr lang="en-US" sz="2000" dirty="0"/>
-          </a:p>
+              <a:rPr lang="en-US" sz="1250" dirty="0">
+                <a:solidFill>
+                  <a:srgbClr val="6E6A85"/>
+                </a:solidFill>
+                <a:latin typeface="맑은 고딕" pitchFamily="34" charset="0"/>
+                <a:ea typeface="맑은 고딕" pitchFamily="34" charset="-122"/>
+                <a:cs typeface="맑은 고딕" pitchFamily="34" charset="-120"/>
+              </a:rPr>
+              <a:t>인공지능 소리인식의 원리 — 컴퓨터가 소리를 듣는 방법</a:t>
+            </a:r>
+            <a:endParaRPr lang="en-US" sz="1250" dirty="0"/>
+          </a:p>
+        </p:txBody>
+      </p:sp>
+      <p:sp>
+        <p:nvSpPr>
+          <p:cNvPr id="13" name="Shape 11"/>
+          <p:cNvSpPr/>
+          <p:nvPr/>
+        </p:nvSpPr>
+        <p:spPr>
+          <a:xfrm>
+            <a:off x="548640" y="3300984"/>
+            <a:ext cx="8046720" cy="822960"/>
+          </a:xfrm>
+          <a:prstGeom prst="roundRect">
+            <a:avLst>
+              <a:gd name="adj" fmla="val 11111"/>
+            </a:avLst>
+          </a:prstGeom>
+          <a:solidFill>
+            <a:srgbClr val="EEEBFA"/>
+          </a:solidFill>
+          <a:ln/>
+        </p:spPr>
+      </p:sp>
+      <p:sp>
+        <p:nvSpPr>
+          <p:cNvPr id="14" name="Shape 12"/>
+          <p:cNvSpPr/>
+          <p:nvPr/>
+        </p:nvSpPr>
+        <p:spPr>
+          <a:xfrm>
+            <a:off x="777240" y="3474720"/>
+            <a:ext cx="475488" cy="475488"/>
+          </a:xfrm>
+          <a:prstGeom prst="ellipse">
+            <a:avLst/>
+          </a:prstGeom>
+          <a:solidFill>
+            <a:srgbClr val="4A3F9E"/>
+          </a:solidFill>
+          <a:ln/>
+        </p:spPr>
+      </p:sp>
+      <p:sp>
+        <p:nvSpPr>
+          <p:cNvPr id="15" name="Text 13"/>
+          <p:cNvSpPr/>
+          <p:nvPr/>
+        </p:nvSpPr>
+        <p:spPr>
+          <a:xfrm>
+            <a:off x="777240" y="3474720"/>
+            <a:ext cx="475488" cy="475488"/>
+          </a:xfrm>
+          <a:prstGeom prst="rect">
+            <a:avLst/>
+          </a:prstGeom>
+          <a:noFill/>
+          <a:ln/>
+        </p:spPr>
+        <p:txBody>
+          <a:bodyPr wrap="square" lIns="0" tIns="0" rIns="0" bIns="0" rtlCol="0" anchor="ctr"/>
+          <a:lstStyle/>
+          <a:p>
+            <a:pPr algn="ctr" indent="0" marL="0">
+              <a:buNone/>
+            </a:pPr>
+            <a:r>
+              <a:rPr lang="en-US" sz="1300" b="1" dirty="0">
+                <a:solidFill>
+                  <a:srgbClr val="FFFFFF"/>
+                </a:solidFill>
+                <a:latin typeface="맑은 고딕" pitchFamily="34" charset="0"/>
+                <a:ea typeface="맑은 고딕" pitchFamily="34" charset="-122"/>
+                <a:cs typeface="맑은 고딕" pitchFamily="34" charset="-120"/>
+              </a:rPr>
+              <a:t>03</a:t>
+            </a:r>
+            <a:endParaRPr lang="en-US" sz="1300" dirty="0"/>
+          </a:p>
+        </p:txBody>
+      </p:sp>
+      <p:sp>
+        <p:nvSpPr>
+          <p:cNvPr id="16" name="Text 14"/>
+          <p:cNvSpPr/>
+          <p:nvPr/>
+        </p:nvSpPr>
+        <p:spPr>
+          <a:xfrm>
+            <a:off x="1463040" y="3419856"/>
+            <a:ext cx="2103120" cy="292608"/>
+          </a:xfrm>
+          <a:prstGeom prst="rect">
+            <a:avLst/>
+          </a:prstGeom>
+          <a:noFill/>
+          <a:ln/>
+        </p:spPr>
+        <p:txBody>
+          <a:bodyPr wrap="square" lIns="0" tIns="0" rIns="0" bIns="0" rtlCol="0" anchor="ctr"/>
+          <a:lstStyle/>
           <a:p>
             <a:pPr indent="0" marL="0">
-              <a:lnSpc>
-                <a:spcPct val="130000"/>
-              </a:lnSpc>
               <a:buNone/>
             </a:pPr>
             <a:r>
-              <a:rPr lang="en-US" sz="2000" dirty="0">
-                <a:solidFill>
-                  <a:srgbClr val="000000"/>
-                </a:solidFill>
-              </a:rPr>
-              <a:t>4. 활동 3: 글의 주제 및 맥락적 의미 해석</a:t>
-            </a:r>
-            <a:endParaRPr lang="en-US" sz="2000" dirty="0"/>
-          </a:p>
+              <a:rPr lang="en-US" sz="1500" b="1" dirty="0">
+                <a:solidFill>
+                  <a:srgbClr val="241C4D"/>
+                </a:solidFill>
+                <a:latin typeface="맑은 고딕" pitchFamily="34" charset="0"/>
+                <a:ea typeface="맑은 고딕" pitchFamily="34" charset="-122"/>
+                <a:cs typeface="맑은 고딕" pitchFamily="34" charset="-120"/>
+              </a:rPr>
+              <a:t>마무리</a:t>
+            </a:r>
+            <a:endParaRPr lang="en-US" sz="1500" dirty="0"/>
+          </a:p>
+        </p:txBody>
+      </p:sp>
+      <p:sp>
+        <p:nvSpPr>
+          <p:cNvPr id="17" name="Text 15"/>
+          <p:cNvSpPr/>
+          <p:nvPr/>
+        </p:nvSpPr>
+        <p:spPr>
+          <a:xfrm>
+            <a:off x="1463040" y="3721608"/>
+            <a:ext cx="6766560" cy="292608"/>
+          </a:xfrm>
+          <a:prstGeom prst="rect">
+            <a:avLst/>
+          </a:prstGeom>
+          <a:noFill/>
+          <a:ln/>
+        </p:spPr>
+        <p:txBody>
+          <a:bodyPr wrap="square" lIns="0" tIns="0" rIns="0" bIns="0" rtlCol="0" anchor="ctr"/>
+          <a:lstStyle/>
           <a:p>
             <a:pPr indent="0" marL="0">
-              <a:lnSpc>
-                <a:spcPct val="130000"/>
-              </a:lnSpc>
               <a:buNone/>
             </a:pPr>
             <a:r>
-              <a:rPr lang="en-US" sz="2000" dirty="0">
-                <a:solidFill>
-                  <a:srgbClr val="000000"/>
-                </a:solidFill>
-              </a:rPr>
-              <a:t>5. 정리 및 결론: 주체적인 독자로 성장하기</a:t>
-            </a:r>
-            <a:endParaRPr lang="en-US" sz="2000" dirty="0"/>
+              <a:rPr lang="en-US" sz="1250" dirty="0">
+                <a:solidFill>
+                  <a:srgbClr val="6E6A85"/>
+                </a:solidFill>
+                <a:latin typeface="맑은 고딕" pitchFamily="34" charset="0"/>
+                <a:ea typeface="맑은 고딕" pitchFamily="34" charset="-122"/>
+                <a:cs typeface="맑은 고딕" pitchFamily="34" charset="-120"/>
+              </a:rPr>
+              <a:t>데이터가 좋아야 인공지능이 똑똑해진다</a:t>
+            </a:r>
+            <a:endParaRPr lang="en-US" sz="1250" dirty="0"/>
           </a:p>
         </p:txBody>
       </p:sp>
@@ -1698,8 +2037,8 @@
         </p:nvSpPr>
         <p:spPr>
           <a:xfrm>
-            <a:off x="457200" y="320040"/>
-            <a:ext cx="11274552" cy="822960"/>
+            <a:off x="548640" y="347472"/>
+            <a:ext cx="8046720" cy="640080"/>
           </a:xfrm>
           <a:prstGeom prst="rect">
             <a:avLst/>
@@ -1708,34 +2047,98 @@
           <a:ln/>
         </p:spPr>
         <p:txBody>
-          <a:bodyPr wrap="square" rtlCol="0" anchor="ctr"/>
+          <a:bodyPr wrap="square" lIns="0" tIns="0" rIns="0" bIns="0" rtlCol="0" anchor="ctr"/>
+          <a:lstStyle/>
+          <a:p>
+            <a:pPr algn="l" indent="0" marL="0">
+              <a:buNone/>
+            </a:pPr>
+            <a:r>
+              <a:rPr lang="en-US" sz="3000" b="1" dirty="0">
+                <a:solidFill>
+                  <a:srgbClr val="241C4D"/>
+                </a:solidFill>
+                <a:latin typeface="맑은 고딕" pitchFamily="34" charset="0"/>
+                <a:ea typeface="맑은 고딕" pitchFamily="34" charset="-122"/>
+                <a:cs typeface="맑은 고딕" pitchFamily="34" charset="-120"/>
+              </a:rPr>
+              <a:t>동기유발 — 숲이 조용해졌다</a:t>
+            </a:r>
+            <a:endParaRPr lang="en-US" sz="3000" dirty="0"/>
+          </a:p>
+        </p:txBody>
+      </p:sp>
+      <p:sp>
+        <p:nvSpPr>
+          <p:cNvPr id="3" name="Shape 1"/>
+          <p:cNvSpPr/>
+          <p:nvPr/>
+        </p:nvSpPr>
+        <p:spPr>
+          <a:xfrm>
+            <a:off x="548640" y="1143000"/>
+            <a:ext cx="4892040" cy="1051560"/>
+          </a:xfrm>
+          <a:prstGeom prst="roundRect">
+            <a:avLst>
+              <a:gd name="adj" fmla="val 10435"/>
+            </a:avLst>
+          </a:prstGeom>
+          <a:solidFill>
+            <a:srgbClr val="241C4D"/>
+          </a:solidFill>
+          <a:ln/>
+        </p:spPr>
+      </p:sp>
+      <p:sp>
+        <p:nvSpPr>
+          <p:cNvPr id="4" name="Text 2"/>
+          <p:cNvSpPr/>
+          <p:nvPr/>
+        </p:nvSpPr>
+        <p:spPr>
+          <a:xfrm>
+            <a:off x="777240" y="1234440"/>
+            <a:ext cx="4480560" cy="868680"/>
+          </a:xfrm>
+          <a:prstGeom prst="rect">
+            <a:avLst/>
+          </a:prstGeom>
+          <a:noFill/>
+          <a:ln/>
+        </p:spPr>
+        <p:txBody>
+          <a:bodyPr wrap="square" lIns="0" tIns="0" rIns="0" bIns="0" rtlCol="0" anchor="ctr"/>
           <a:lstStyle/>
           <a:p>
             <a:pPr indent="0" marL="0">
               <a:buNone/>
             </a:pPr>
             <a:r>
-              <a:rPr lang="en-US" sz="2600" b="1" dirty="0">
-                <a:solidFill>
-                  <a:srgbClr val="D97706"/>
-                </a:solidFill>
-              </a:rPr>
-              <a:t>효과적인 글 읽기는 어떻게 이루어지는가?</a:t>
-            </a:r>
-            <a:endParaRPr lang="en-US" sz="2600" dirty="0"/>
-          </a:p>
-        </p:txBody>
-      </p:sp>
-      <p:sp>
-        <p:nvSpPr>
-          <p:cNvPr id="3" name="Text 1"/>
-          <p:cNvSpPr/>
-          <p:nvPr/>
-        </p:nvSpPr>
-        <p:spPr>
-          <a:xfrm>
-            <a:off x="822960" y="1737360"/>
-            <a:ext cx="10543032" cy="4114800"/>
+              <a:rPr lang="en-US" sz="1600" b="1" dirty="0">
+                <a:solidFill>
+                  <a:srgbClr val="FFFFFF"/>
+                </a:solidFill>
+                <a:latin typeface="맑은 고딕" pitchFamily="34" charset="0"/>
+                <a:ea typeface="맑은 고딕" pitchFamily="34" charset="-122"/>
+                <a:cs typeface="맑은 고딕" pitchFamily="34" charset="-120"/>
+              </a:rPr>
+              <a:t>“세계수가 병들었다. 단서는 숲의 ‘소리’ 뿐이다.”</a:t>
+            </a:r>
+            <a:endParaRPr lang="en-US" sz="1600" dirty="0"/>
+          </a:p>
+        </p:txBody>
+      </p:sp>
+      <p:sp>
+        <p:nvSpPr>
+          <p:cNvPr id="5" name="Text 3"/>
+          <p:cNvSpPr/>
+          <p:nvPr/>
+        </p:nvSpPr>
+        <p:spPr>
+          <a:xfrm>
+            <a:off x="566928" y="2423160"/>
+            <a:ext cx="4892040" cy="1463040"/>
           </a:xfrm>
           <a:prstGeom prst="rect">
             <a:avLst/>
@@ -1744,24 +2147,478 @@
           <a:ln/>
         </p:spPr>
         <p:txBody>
-          <a:bodyPr wrap="square" rtlCol="0" anchor="ctr"/>
+          <a:bodyPr wrap="square" lIns="0" tIns="0" rIns="0" bIns="0" rtlCol="0" anchor="ctr"/>
+          <a:lstStyle/>
+          <a:p>
+            <a:pPr marL="342900" indent="-342900">
+              <a:spcAft>
+                <a:spcPts val="800"/>
+              </a:spcAft>
+              <a:buSzPct val="100000"/>
+              <a:buChar char="•"/>
+            </a:pPr>
+            <a:r>
+              <a:rPr lang="en-US" sz="1450" dirty="0">
+                <a:solidFill>
+                  <a:srgbClr val="2E2E38"/>
+                </a:solidFill>
+                <a:latin typeface="맑은 고딕" pitchFamily="34" charset="0"/>
+                <a:ea typeface="맑은 고딕" pitchFamily="34" charset="-122"/>
+                <a:cs typeface="맑은 고딕" pitchFamily="34" charset="-120"/>
+              </a:rPr>
+              <a:t>새소리 · 물소리 · 벌목 소리를 구분해 낼 수 있다면?</a:t>
+            </a:r>
+            <a:endParaRPr lang="en-US" sz="1450" dirty="0"/>
+          </a:p>
+          <a:p>
+            <a:pPr marL="342900" indent="-342900">
+              <a:spcAft>
+                <a:spcPts val="800"/>
+              </a:spcAft>
+              <a:buSzPct val="100000"/>
+              <a:buChar char="•"/>
+            </a:pPr>
+            <a:r>
+              <a:rPr lang="en-US" sz="1450" dirty="0">
+                <a:solidFill>
+                  <a:srgbClr val="2E2E38"/>
+                </a:solidFill>
+                <a:latin typeface="맑은 고딕" pitchFamily="34" charset="0"/>
+                <a:ea typeface="맑은 고딕" pitchFamily="34" charset="-122"/>
+                <a:cs typeface="맑은 고딕" pitchFamily="34" charset="-120"/>
+              </a:rPr>
+              <a:t>사람은 귀로 듣는다. 그렇다면 컴퓨터는 무엇으로 들을까?</a:t>
+            </a:r>
+            <a:endParaRPr lang="en-US" sz="1450" dirty="0"/>
+          </a:p>
+          <a:p>
+            <a:pPr marL="342900" indent="-342900">
+              <a:spcAft>
+                <a:spcPts val="800"/>
+              </a:spcAft>
+              <a:buSzPct val="100000"/>
+              <a:buChar char="•"/>
+            </a:pPr>
+            <a:r>
+              <a:rPr lang="en-US" sz="1450" dirty="0">
+                <a:solidFill>
+                  <a:srgbClr val="2E2E38"/>
+                </a:solidFill>
+                <a:latin typeface="맑은 고딕" pitchFamily="34" charset="0"/>
+                <a:ea typeface="맑은 고딕" pitchFamily="34" charset="-122"/>
+                <a:cs typeface="맑은 고딕" pitchFamily="34" charset="-120"/>
+              </a:rPr>
+              <a:t>휴대폰 음성 비서는 내 목소리를 어떻게 알아들을까?</a:t>
+            </a:r>
+            <a:endParaRPr lang="en-US" sz="1450" dirty="0"/>
+          </a:p>
+        </p:txBody>
+      </p:sp>
+      <p:sp>
+        <p:nvSpPr>
+          <p:cNvPr id="6" name="Shape 4"/>
+          <p:cNvSpPr/>
+          <p:nvPr/>
+        </p:nvSpPr>
+        <p:spPr>
+          <a:xfrm>
+            <a:off x="548640" y="3977640"/>
+            <a:ext cx="4892040" cy="658368"/>
+          </a:xfrm>
+          <a:prstGeom prst="roundRect">
+            <a:avLst>
+              <a:gd name="adj" fmla="val 13889"/>
+            </a:avLst>
+          </a:prstGeom>
+          <a:solidFill>
+            <a:srgbClr val="EEEBFA"/>
+          </a:solidFill>
+          <a:ln/>
+        </p:spPr>
+      </p:sp>
+      <p:sp>
+        <p:nvSpPr>
+          <p:cNvPr id="7" name="Text 5"/>
+          <p:cNvSpPr/>
+          <p:nvPr/>
+        </p:nvSpPr>
+        <p:spPr>
+          <a:xfrm>
+            <a:off x="777240" y="3977640"/>
+            <a:ext cx="4480560" cy="658368"/>
+          </a:xfrm>
+          <a:prstGeom prst="rect">
+            <a:avLst/>
+          </a:prstGeom>
+          <a:noFill/>
+          <a:ln/>
+        </p:spPr>
+        <p:txBody>
+          <a:bodyPr wrap="square" lIns="0" tIns="0" rIns="0" bIns="0" rtlCol="0" anchor="ctr"/>
           <a:lstStyle/>
           <a:p>
             <a:pPr indent="0" marL="0">
-              <a:lnSpc>
-                <a:spcPct val="130000"/>
-              </a:lnSpc>
               <a:buNone/>
             </a:pPr>
             <a:r>
-              <a:rPr lang="en-US" sz="2200" dirty="0">
-                <a:solidFill>
-                  <a:srgbClr val="000000"/>
-                </a:solidFill>
-              </a:rPr>
-              <a:t>글을 정확하게 이해하기 위해서는 어휘의 관계를 파악하고, 정보를 시각적으로 구조화하며, 맥락을 통해 깊이 있게 의미를 해석하는 능력이 필요합니다.</a:t>
-            </a:r>
-            <a:endParaRPr lang="en-US" sz="2200" dirty="0"/>
+              <a:rPr lang="en-US" sz="1300" b="1" dirty="0">
+                <a:solidFill>
+                  <a:srgbClr val="4A3F9E"/>
+                </a:solidFill>
+                <a:latin typeface="맑은 고딕" pitchFamily="34" charset="0"/>
+                <a:ea typeface="맑은 고딕" pitchFamily="34" charset="-122"/>
+                <a:cs typeface="맑은 고딕" pitchFamily="34" charset="-120"/>
+              </a:rPr>
+              <a:t>발문 : 소리를 컴퓨터에 저장하려면 무엇으로 바꿔야 할까요?</a:t>
+            </a:r>
+            <a:endParaRPr lang="en-US" sz="1300" dirty="0"/>
+          </a:p>
+        </p:txBody>
+      </p:sp>
+      <p:sp>
+        <p:nvSpPr>
+          <p:cNvPr id="8" name="Shape 6"/>
+          <p:cNvSpPr/>
+          <p:nvPr/>
+        </p:nvSpPr>
+        <p:spPr>
+          <a:xfrm>
+            <a:off x="5760720" y="1143000"/>
+            <a:ext cx="2834640" cy="3493008"/>
+          </a:xfrm>
+          <a:prstGeom prst="roundRect">
+            <a:avLst>
+              <a:gd name="adj" fmla="val 4516"/>
+            </a:avLst>
+          </a:prstGeom>
+          <a:solidFill>
+            <a:srgbClr val="EEEBFA"/>
+          </a:solidFill>
+          <a:ln/>
+        </p:spPr>
+      </p:sp>
+      <p:sp>
+        <p:nvSpPr>
+          <p:cNvPr id="9" name="Shape 7"/>
+          <p:cNvSpPr/>
+          <p:nvPr/>
+        </p:nvSpPr>
+        <p:spPr>
+          <a:xfrm>
+            <a:off x="5989320" y="2491740"/>
+            <a:ext cx="91440" cy="320040"/>
+          </a:xfrm>
+          <a:prstGeom prst="roundRect">
+            <a:avLst>
+              <a:gd name="adj" fmla="val 50000"/>
+            </a:avLst>
+          </a:prstGeom>
+          <a:solidFill>
+            <a:srgbClr val="F5B400"/>
+          </a:solidFill>
+          <a:ln/>
+        </p:spPr>
+      </p:sp>
+      <p:sp>
+        <p:nvSpPr>
+          <p:cNvPr id="10" name="Shape 8"/>
+          <p:cNvSpPr/>
+          <p:nvPr/>
+        </p:nvSpPr>
+        <p:spPr>
+          <a:xfrm>
+            <a:off x="6172200" y="2308860"/>
+            <a:ext cx="91440" cy="685800"/>
+          </a:xfrm>
+          <a:prstGeom prst="roundRect">
+            <a:avLst>
+              <a:gd name="adj" fmla="val 50000"/>
+            </a:avLst>
+          </a:prstGeom>
+          <a:solidFill>
+            <a:srgbClr val="4A3F9E"/>
+          </a:solidFill>
+          <a:ln/>
+        </p:spPr>
+      </p:sp>
+      <p:sp>
+        <p:nvSpPr>
+          <p:cNvPr id="11" name="Shape 9"/>
+          <p:cNvSpPr/>
+          <p:nvPr/>
+        </p:nvSpPr>
+        <p:spPr>
+          <a:xfrm>
+            <a:off x="6355080" y="2080260"/>
+            <a:ext cx="91440" cy="1143000"/>
+          </a:xfrm>
+          <a:prstGeom prst="roundRect">
+            <a:avLst>
+              <a:gd name="adj" fmla="val 50000"/>
+            </a:avLst>
+          </a:prstGeom>
+          <a:solidFill>
+            <a:srgbClr val="4A3F9E"/>
+          </a:solidFill>
+          <a:ln/>
+        </p:spPr>
+      </p:sp>
+      <p:sp>
+        <p:nvSpPr>
+          <p:cNvPr id="12" name="Shape 10"/>
+          <p:cNvSpPr/>
+          <p:nvPr/>
+        </p:nvSpPr>
+        <p:spPr>
+          <a:xfrm>
+            <a:off x="6537960" y="2240280"/>
+            <a:ext cx="91440" cy="822960"/>
+          </a:xfrm>
+          <a:prstGeom prst="roundRect">
+            <a:avLst>
+              <a:gd name="adj" fmla="val 50000"/>
+            </a:avLst>
+          </a:prstGeom>
+          <a:solidFill>
+            <a:srgbClr val="F5B400"/>
+          </a:solidFill>
+          <a:ln/>
+        </p:spPr>
+      </p:sp>
+      <p:sp>
+        <p:nvSpPr>
+          <p:cNvPr id="13" name="Shape 11"/>
+          <p:cNvSpPr/>
+          <p:nvPr/>
+        </p:nvSpPr>
+        <p:spPr>
+          <a:xfrm>
+            <a:off x="6720840" y="1897380"/>
+            <a:ext cx="91440" cy="1508760"/>
+          </a:xfrm>
+          <a:prstGeom prst="roundRect">
+            <a:avLst>
+              <a:gd name="adj" fmla="val 50000"/>
+            </a:avLst>
+          </a:prstGeom>
+          <a:solidFill>
+            <a:srgbClr val="4A3F9E"/>
+          </a:solidFill>
+          <a:ln/>
+        </p:spPr>
+      </p:sp>
+      <p:sp>
+        <p:nvSpPr>
+          <p:cNvPr id="14" name="Shape 12"/>
+          <p:cNvSpPr/>
+          <p:nvPr/>
+        </p:nvSpPr>
+        <p:spPr>
+          <a:xfrm>
+            <a:off x="6903720" y="2125980"/>
+            <a:ext cx="91440" cy="1051560"/>
+          </a:xfrm>
+          <a:prstGeom prst="roundRect">
+            <a:avLst>
+              <a:gd name="adj" fmla="val 50000"/>
+            </a:avLst>
+          </a:prstGeom>
+          <a:solidFill>
+            <a:srgbClr val="4A3F9E"/>
+          </a:solidFill>
+          <a:ln/>
+        </p:spPr>
+      </p:sp>
+      <p:sp>
+        <p:nvSpPr>
+          <p:cNvPr id="15" name="Shape 13"/>
+          <p:cNvSpPr/>
+          <p:nvPr/>
+        </p:nvSpPr>
+        <p:spPr>
+          <a:xfrm>
+            <a:off x="7086600" y="1783080"/>
+            <a:ext cx="91440" cy="1737360"/>
+          </a:xfrm>
+          <a:prstGeom prst="roundRect">
+            <a:avLst>
+              <a:gd name="adj" fmla="val 50000"/>
+            </a:avLst>
+          </a:prstGeom>
+          <a:solidFill>
+            <a:srgbClr val="F5B400"/>
+          </a:solidFill>
+          <a:ln/>
+        </p:spPr>
+      </p:sp>
+      <p:sp>
+        <p:nvSpPr>
+          <p:cNvPr id="16" name="Shape 14"/>
+          <p:cNvSpPr/>
+          <p:nvPr/>
+        </p:nvSpPr>
+        <p:spPr>
+          <a:xfrm>
+            <a:off x="7269480" y="2057400"/>
+            <a:ext cx="91440" cy="1188720"/>
+          </a:xfrm>
+          <a:prstGeom prst="roundRect">
+            <a:avLst>
+              <a:gd name="adj" fmla="val 50000"/>
+            </a:avLst>
+          </a:prstGeom>
+          <a:solidFill>
+            <a:srgbClr val="4A3F9E"/>
+          </a:solidFill>
+          <a:ln/>
+        </p:spPr>
+      </p:sp>
+      <p:sp>
+        <p:nvSpPr>
+          <p:cNvPr id="17" name="Shape 15"/>
+          <p:cNvSpPr/>
+          <p:nvPr/>
+        </p:nvSpPr>
+        <p:spPr>
+          <a:xfrm>
+            <a:off x="7452360" y="2263140"/>
+            <a:ext cx="91440" cy="777240"/>
+          </a:xfrm>
+          <a:prstGeom prst="roundRect">
+            <a:avLst>
+              <a:gd name="adj" fmla="val 50000"/>
+            </a:avLst>
+          </a:prstGeom>
+          <a:solidFill>
+            <a:srgbClr val="4A3F9E"/>
+          </a:solidFill>
+          <a:ln/>
+        </p:spPr>
+      </p:sp>
+      <p:sp>
+        <p:nvSpPr>
+          <p:cNvPr id="18" name="Shape 16"/>
+          <p:cNvSpPr/>
+          <p:nvPr/>
+        </p:nvSpPr>
+        <p:spPr>
+          <a:xfrm>
+            <a:off x="7635240" y="1988820"/>
+            <a:ext cx="91440" cy="1325880"/>
+          </a:xfrm>
+          <a:prstGeom prst="roundRect">
+            <a:avLst>
+              <a:gd name="adj" fmla="val 50000"/>
+            </a:avLst>
+          </a:prstGeom>
+          <a:solidFill>
+            <a:srgbClr val="F5B400"/>
+          </a:solidFill>
+          <a:ln/>
+        </p:spPr>
+      </p:sp>
+      <p:sp>
+        <p:nvSpPr>
+          <p:cNvPr id="19" name="Shape 17"/>
+          <p:cNvSpPr/>
+          <p:nvPr/>
+        </p:nvSpPr>
+        <p:spPr>
+          <a:xfrm>
+            <a:off x="7818120" y="2377440"/>
+            <a:ext cx="91440" cy="548640"/>
+          </a:xfrm>
+          <a:prstGeom prst="roundRect">
+            <a:avLst>
+              <a:gd name="adj" fmla="val 50000"/>
+            </a:avLst>
+          </a:prstGeom>
+          <a:solidFill>
+            <a:srgbClr val="4A3F9E"/>
+          </a:solidFill>
+          <a:ln/>
+        </p:spPr>
+      </p:sp>
+      <p:sp>
+        <p:nvSpPr>
+          <p:cNvPr id="20" name="Shape 18"/>
+          <p:cNvSpPr/>
+          <p:nvPr/>
+        </p:nvSpPr>
+        <p:spPr>
+          <a:xfrm>
+            <a:off x="8001000" y="2194560"/>
+            <a:ext cx="91440" cy="914400"/>
+          </a:xfrm>
+          <a:prstGeom prst="roundRect">
+            <a:avLst>
+              <a:gd name="adj" fmla="val 50000"/>
+            </a:avLst>
+          </a:prstGeom>
+          <a:solidFill>
+            <a:srgbClr val="4A3F9E"/>
+          </a:solidFill>
+          <a:ln/>
+        </p:spPr>
+      </p:sp>
+      <p:sp>
+        <p:nvSpPr>
+          <p:cNvPr id="21" name="Shape 19"/>
+          <p:cNvSpPr/>
+          <p:nvPr/>
+        </p:nvSpPr>
+        <p:spPr>
+          <a:xfrm>
+            <a:off x="8183880" y="2468880"/>
+            <a:ext cx="91440" cy="365760"/>
+          </a:xfrm>
+          <a:prstGeom prst="roundRect">
+            <a:avLst>
+              <a:gd name="adj" fmla="val 50000"/>
+            </a:avLst>
+          </a:prstGeom>
+          <a:solidFill>
+            <a:srgbClr val="F5B400"/>
+          </a:solidFill>
+          <a:ln/>
+        </p:spPr>
+      </p:sp>
+      <p:sp>
+        <p:nvSpPr>
+          <p:cNvPr id="22" name="Text 20"/>
+          <p:cNvSpPr/>
+          <p:nvPr/>
+        </p:nvSpPr>
+        <p:spPr>
+          <a:xfrm>
+            <a:off x="5852160" y="3977640"/>
+            <a:ext cx="2651760" cy="365760"/>
+          </a:xfrm>
+          <a:prstGeom prst="rect">
+            <a:avLst/>
+          </a:prstGeom>
+          <a:noFill/>
+          <a:ln/>
+        </p:spPr>
+        <p:txBody>
+          <a:bodyPr wrap="square" lIns="0" tIns="0" rIns="0" bIns="0" rtlCol="0" anchor="ctr"/>
+          <a:lstStyle/>
+          <a:p>
+            <a:pPr algn="ctr" indent="0" marL="0">
+              <a:buNone/>
+            </a:pPr>
+            <a:r>
+              <a:rPr lang="en-US" sz="1250" dirty="0">
+                <a:solidFill>
+                  <a:srgbClr val="6E6A85"/>
+                </a:solidFill>
+                <a:latin typeface="맑은 고딕" pitchFamily="34" charset="0"/>
+                <a:ea typeface="맑은 고딕" pitchFamily="34" charset="-122"/>
+                <a:cs typeface="맑은 고딕" pitchFamily="34" charset="-120"/>
+              </a:rPr>
+              <a:t>소리 = 흔들리는 공기의 파동</a:t>
+            </a:r>
+            <a:endParaRPr lang="en-US" sz="1250" dirty="0"/>
           </a:p>
         </p:txBody>
       </p:sp>
@@ -1798,8 +2655,8 @@
         </p:nvSpPr>
         <p:spPr>
           <a:xfrm>
-            <a:off x="457200" y="320040"/>
-            <a:ext cx="11274552" cy="822960"/>
+            <a:off x="548640" y="347472"/>
+            <a:ext cx="8046720" cy="640080"/>
           </a:xfrm>
           <a:prstGeom prst="rect">
             <a:avLst/>
@@ -1808,34 +2665,96 @@
           <a:ln/>
         </p:spPr>
         <p:txBody>
-          <a:bodyPr wrap="square" rtlCol="0" anchor="ctr"/>
+          <a:bodyPr wrap="square" lIns="0" tIns="0" rIns="0" bIns="0" rtlCol="0" anchor="ctr"/>
+          <a:lstStyle/>
+          <a:p>
+            <a:pPr algn="l" indent="0" marL="0">
+              <a:buNone/>
+            </a:pPr>
+            <a:r>
+              <a:rPr lang="en-US" sz="2800" b="1" dirty="0">
+                <a:solidFill>
+                  <a:srgbClr val="241C4D"/>
+                </a:solidFill>
+                <a:latin typeface="맑은 고딕" pitchFamily="34" charset="0"/>
+                <a:ea typeface="맑은 고딕" pitchFamily="34" charset="-122"/>
+                <a:cs typeface="맑은 고딕" pitchFamily="34" charset="-120"/>
+              </a:rPr>
+              <a:t>[3-1] 인공지능 소리인식의 원리</a:t>
+            </a:r>
+            <a:endParaRPr lang="en-US" sz="2800" dirty="0"/>
+          </a:p>
+        </p:txBody>
+      </p:sp>
+      <p:sp>
+        <p:nvSpPr>
+          <p:cNvPr id="3" name="Text 1"/>
+          <p:cNvSpPr/>
+          <p:nvPr/>
+        </p:nvSpPr>
+        <p:spPr>
+          <a:xfrm>
+            <a:off x="548640" y="932688"/>
+            <a:ext cx="4754880" cy="320040"/>
+          </a:xfrm>
+          <a:prstGeom prst="rect">
+            <a:avLst/>
+          </a:prstGeom>
+          <a:noFill/>
+          <a:ln/>
+        </p:spPr>
+        <p:txBody>
+          <a:bodyPr wrap="square" lIns="0" tIns="0" rIns="0" bIns="0" rtlCol="0" anchor="ctr"/>
           <a:lstStyle/>
           <a:p>
             <a:pPr indent="0" marL="0">
               <a:buNone/>
             </a:pPr>
             <a:r>
-              <a:rPr lang="en-US" sz="2600" b="1" dirty="0">
-                <a:solidFill>
-                  <a:srgbClr val="D97706"/>
-                </a:solidFill>
-              </a:rPr>
-              <a:t>[활동 1] 어휘 의미 관계 파악하기</a:t>
-            </a:r>
-            <a:endParaRPr lang="en-US" sz="2600" dirty="0"/>
-          </a:p>
-        </p:txBody>
-      </p:sp>
-      <p:sp>
-        <p:nvSpPr>
-          <p:cNvPr id="3" name="Text 1"/>
-          <p:cNvSpPr/>
-          <p:nvPr/>
-        </p:nvSpPr>
-        <p:spPr>
-          <a:xfrm>
-            <a:off x="822960" y="1645920"/>
-            <a:ext cx="10543032" cy="3931920"/>
+              <a:rPr lang="en-US" sz="1400" b="1" dirty="0">
+                <a:solidFill>
+                  <a:srgbClr val="F5B400"/>
+                </a:solidFill>
+                <a:latin typeface="맑은 고딕" pitchFamily="34" charset="0"/>
+                <a:ea typeface="맑은 고딕" pitchFamily="34" charset="-122"/>
+                <a:cs typeface="맑은 고딕" pitchFamily="34" charset="-120"/>
+              </a:rPr>
+              <a:t>컴퓨터가 소리를 듣는 방법</a:t>
+            </a:r>
+            <a:endParaRPr lang="en-US" sz="1400" dirty="0"/>
+          </a:p>
+        </p:txBody>
+      </p:sp>
+      <p:sp>
+        <p:nvSpPr>
+          <p:cNvPr id="4" name="Shape 2"/>
+          <p:cNvSpPr/>
+          <p:nvPr/>
+        </p:nvSpPr>
+        <p:spPr>
+          <a:xfrm>
+            <a:off x="566928" y="1472184"/>
+            <a:ext cx="402336" cy="402336"/>
+          </a:xfrm>
+          <a:prstGeom prst="ellipse">
+            <a:avLst/>
+          </a:prstGeom>
+          <a:solidFill>
+            <a:srgbClr val="4A3F9E"/>
+          </a:solidFill>
+          <a:ln/>
+        </p:spPr>
+      </p:sp>
+      <p:sp>
+        <p:nvSpPr>
+          <p:cNvPr id="5" name="Text 3"/>
+          <p:cNvSpPr/>
+          <p:nvPr/>
+        </p:nvSpPr>
+        <p:spPr>
+          <a:xfrm>
+            <a:off x="566928" y="1472184"/>
+            <a:ext cx="402336" cy="402336"/>
           </a:xfrm>
           <a:prstGeom prst="rect">
             <a:avLst/>
@@ -1844,74 +2763,37 @@
           <a:ln/>
         </p:spPr>
         <p:txBody>
-          <a:bodyPr wrap="square" rtlCol="0" anchor="ctr"/>
-          <a:lstStyle/>
-          <a:p>
-            <a:pPr marL="342900" indent="-342900">
-              <a:lnSpc>
-                <a:spcPct val="125000"/>
-              </a:lnSpc>
-              <a:buSzPct val="100000"/>
-              <a:buChar char="•"/>
-            </a:pPr>
-            <a:r>
-              <a:rPr lang="en-US" sz="2000" dirty="0">
-                <a:solidFill>
-                  <a:srgbClr val="000000"/>
-                </a:solidFill>
-              </a:rPr>
-              <a:t>유의, 반의, 상하 관계 등 어휘 간의 의미적 연결성 탐구</a:t>
-            </a:r>
-            <a:endParaRPr lang="en-US" sz="2000" dirty="0"/>
-          </a:p>
-          <a:p>
-            <a:pPr marL="342900" indent="-342900">
-              <a:lnSpc>
-                <a:spcPct val="125000"/>
-              </a:lnSpc>
-              <a:buSzPct val="100000"/>
-              <a:buChar char="•"/>
-            </a:pPr>
-            <a:r>
-              <a:rPr lang="en-US" sz="2000" dirty="0">
-                <a:solidFill>
-                  <a:srgbClr val="000000"/>
-                </a:solidFill>
-              </a:rPr>
-              <a:t>문맥 속에서 활용된 어휘의 다의적·비유적 의미 이해</a:t>
-            </a:r>
-            <a:endParaRPr lang="en-US" sz="2000" dirty="0"/>
-          </a:p>
-          <a:p>
-            <a:pPr marL="342900" indent="-342900">
-              <a:lnSpc>
-                <a:spcPct val="125000"/>
-              </a:lnSpc>
-              <a:buSzPct val="100000"/>
-              <a:buChar char="•"/>
-            </a:pPr>
-            <a:r>
-              <a:rPr lang="en-US" sz="2000" dirty="0">
-                <a:solidFill>
-                  <a:srgbClr val="000000"/>
-                </a:solidFill>
-              </a:rPr>
-              <a:t>어휘력 확장을 통한 정확한 문장 이해도 향상</a:t>
-            </a:r>
-            <a:endParaRPr lang="en-US" sz="2000" dirty="0"/>
-          </a:p>
-        </p:txBody>
-      </p:sp>
-      <p:sp>
-        <p:nvSpPr>
-          <p:cNvPr id="4" name="Text 2"/>
-          <p:cNvSpPr/>
-          <p:nvPr/>
-        </p:nvSpPr>
-        <p:spPr>
-          <a:xfrm>
-            <a:off x="822960" y="6126480"/>
-            <a:ext cx="10543032" cy="457200"/>
+          <a:bodyPr wrap="square" lIns="0" tIns="0" rIns="0" bIns="0" rtlCol="0" anchor="ctr"/>
+          <a:lstStyle/>
+          <a:p>
+            <a:pPr algn="ctr" indent="0" marL="0">
+              <a:buNone/>
+            </a:pPr>
+            <a:r>
+              <a:rPr lang="en-US" sz="1150" b="1" dirty="0">
+                <a:solidFill>
+                  <a:srgbClr val="FFFFFF"/>
+                </a:solidFill>
+                <a:latin typeface="맑은 고딕" pitchFamily="34" charset="0"/>
+                <a:ea typeface="맑은 고딕" pitchFamily="34" charset="-122"/>
+                <a:cs typeface="맑은 고딕" pitchFamily="34" charset="-120"/>
+              </a:rPr>
+              <a:t>01</a:t>
+            </a:r>
+            <a:endParaRPr lang="en-US" sz="1150" dirty="0"/>
+          </a:p>
+        </p:txBody>
+      </p:sp>
+      <p:sp>
+        <p:nvSpPr>
+          <p:cNvPr id="6" name="Text 4"/>
+          <p:cNvSpPr/>
+          <p:nvPr/>
+        </p:nvSpPr>
+        <p:spPr>
+          <a:xfrm>
+            <a:off x="1115568" y="1417320"/>
+            <a:ext cx="3566160" cy="292608"/>
           </a:xfrm>
           <a:prstGeom prst="rect">
             <a:avLst/>
@@ -1920,18 +2802,472 @@
           <a:ln/>
         </p:spPr>
         <p:txBody>
-          <a:bodyPr wrap="square" rtlCol="0" anchor="ctr"/>
+          <a:bodyPr wrap="square" lIns="0" tIns="0" rIns="0" bIns="0" rtlCol="0" anchor="ctr"/>
           <a:lstStyle/>
           <a:p>
             <a:pPr indent="0" marL="0">
               <a:buNone/>
             </a:pPr>
             <a:r>
-              <a:rPr lang="en-US" sz="1400" u="sng" dirty="0">
-                <a:solidFill>
-                  <a:srgbClr val="1155CC"/>
-                </a:solidFill>
-                <a:hlinkClick r:id="rId1" invalidUrl="" action="" tgtFrame="" tooltip="" history="1" highlightClick="0" endSnd="0">
+              <a:rPr lang="en-US" sz="1500" b="1" dirty="0">
+                <a:solidFill>
+                  <a:srgbClr val="241C4D"/>
+                </a:solidFill>
+                <a:latin typeface="맑은 고딕" pitchFamily="34" charset="0"/>
+                <a:ea typeface="맑은 고딕" pitchFamily="34" charset="-122"/>
+                <a:cs typeface="맑은 고딕" pitchFamily="34" charset="-120"/>
+              </a:rPr>
+              <a:t>소리 → 전기 신호</a:t>
+            </a:r>
+            <a:endParaRPr lang="en-US" sz="1500" dirty="0"/>
+          </a:p>
+        </p:txBody>
+      </p:sp>
+      <p:sp>
+        <p:nvSpPr>
+          <p:cNvPr id="7" name="Text 5"/>
+          <p:cNvSpPr/>
+          <p:nvPr/>
+        </p:nvSpPr>
+        <p:spPr>
+          <a:xfrm>
+            <a:off x="1115568" y="1728216"/>
+            <a:ext cx="4023360" cy="502920"/>
+          </a:xfrm>
+          <a:prstGeom prst="rect">
+            <a:avLst/>
+          </a:prstGeom>
+          <a:noFill/>
+          <a:ln/>
+        </p:spPr>
+        <p:txBody>
+          <a:bodyPr wrap="square" lIns="0" tIns="0" rIns="0" bIns="0" rtlCol="0" anchor="ctr"/>
+          <a:lstStyle/>
+          <a:p>
+            <a:pPr indent="0" marL="0">
+              <a:buNone/>
+            </a:pPr>
+            <a:r>
+              <a:rPr lang="en-US" sz="1250" dirty="0">
+                <a:solidFill>
+                  <a:srgbClr val="6E6A85"/>
+                </a:solidFill>
+                <a:latin typeface="맑은 고딕" pitchFamily="34" charset="0"/>
+                <a:ea typeface="맑은 고딕" pitchFamily="34" charset="-122"/>
+                <a:cs typeface="맑은 고딕" pitchFamily="34" charset="-120"/>
+              </a:rPr>
+              <a:t>마이크가 공기의 진동을 전류의 변화로 바꾼다.</a:t>
+            </a:r>
+            <a:endParaRPr lang="en-US" sz="1250" dirty="0"/>
+          </a:p>
+        </p:txBody>
+      </p:sp>
+      <p:sp>
+        <p:nvSpPr>
+          <p:cNvPr id="8" name="Shape 6"/>
+          <p:cNvSpPr/>
+          <p:nvPr/>
+        </p:nvSpPr>
+        <p:spPr>
+          <a:xfrm>
+            <a:off x="566928" y="2414016"/>
+            <a:ext cx="402336" cy="402336"/>
+          </a:xfrm>
+          <a:prstGeom prst="ellipse">
+            <a:avLst/>
+          </a:prstGeom>
+          <a:solidFill>
+            <a:srgbClr val="4A3F9E"/>
+          </a:solidFill>
+          <a:ln/>
+        </p:spPr>
+      </p:sp>
+      <p:sp>
+        <p:nvSpPr>
+          <p:cNvPr id="9" name="Text 7"/>
+          <p:cNvSpPr/>
+          <p:nvPr/>
+        </p:nvSpPr>
+        <p:spPr>
+          <a:xfrm>
+            <a:off x="566928" y="2414016"/>
+            <a:ext cx="402336" cy="402336"/>
+          </a:xfrm>
+          <a:prstGeom prst="rect">
+            <a:avLst/>
+          </a:prstGeom>
+          <a:noFill/>
+          <a:ln/>
+        </p:spPr>
+        <p:txBody>
+          <a:bodyPr wrap="square" lIns="0" tIns="0" rIns="0" bIns="0" rtlCol="0" anchor="ctr"/>
+          <a:lstStyle/>
+          <a:p>
+            <a:pPr algn="ctr" indent="0" marL="0">
+              <a:buNone/>
+            </a:pPr>
+            <a:r>
+              <a:rPr lang="en-US" sz="1150" b="1" dirty="0">
+                <a:solidFill>
+                  <a:srgbClr val="FFFFFF"/>
+                </a:solidFill>
+                <a:latin typeface="맑은 고딕" pitchFamily="34" charset="0"/>
+                <a:ea typeface="맑은 고딕" pitchFamily="34" charset="-122"/>
+                <a:cs typeface="맑은 고딕" pitchFamily="34" charset="-120"/>
+              </a:rPr>
+              <a:t>02</a:t>
+            </a:r>
+            <a:endParaRPr lang="en-US" sz="1150" dirty="0"/>
+          </a:p>
+        </p:txBody>
+      </p:sp>
+      <p:sp>
+        <p:nvSpPr>
+          <p:cNvPr id="10" name="Text 8"/>
+          <p:cNvSpPr/>
+          <p:nvPr/>
+        </p:nvSpPr>
+        <p:spPr>
+          <a:xfrm>
+            <a:off x="1115568" y="2359152"/>
+            <a:ext cx="3566160" cy="292608"/>
+          </a:xfrm>
+          <a:prstGeom prst="rect">
+            <a:avLst/>
+          </a:prstGeom>
+          <a:noFill/>
+          <a:ln/>
+        </p:spPr>
+        <p:txBody>
+          <a:bodyPr wrap="square" lIns="0" tIns="0" rIns="0" bIns="0" rtlCol="0" anchor="ctr"/>
+          <a:lstStyle/>
+          <a:p>
+            <a:pPr indent="0" marL="0">
+              <a:buNone/>
+            </a:pPr>
+            <a:r>
+              <a:rPr lang="en-US" sz="1500" b="1" dirty="0">
+                <a:solidFill>
+                  <a:srgbClr val="241C4D"/>
+                </a:solidFill>
+                <a:latin typeface="맑은 고딕" pitchFamily="34" charset="0"/>
+                <a:ea typeface="맑은 고딕" pitchFamily="34" charset="-122"/>
+                <a:cs typeface="맑은 고딕" pitchFamily="34" charset="-120"/>
+              </a:rPr>
+              <a:t>전기 신호 → 디지털 데이터</a:t>
+            </a:r>
+            <a:endParaRPr lang="en-US" sz="1500" dirty="0"/>
+          </a:p>
+        </p:txBody>
+      </p:sp>
+      <p:sp>
+        <p:nvSpPr>
+          <p:cNvPr id="11" name="Text 9"/>
+          <p:cNvSpPr/>
+          <p:nvPr/>
+        </p:nvSpPr>
+        <p:spPr>
+          <a:xfrm>
+            <a:off x="1115568" y="2670048"/>
+            <a:ext cx="4023360" cy="502920"/>
+          </a:xfrm>
+          <a:prstGeom prst="rect">
+            <a:avLst/>
+          </a:prstGeom>
+          <a:noFill/>
+          <a:ln/>
+        </p:spPr>
+        <p:txBody>
+          <a:bodyPr wrap="square" lIns="0" tIns="0" rIns="0" bIns="0" rtlCol="0" anchor="ctr"/>
+          <a:lstStyle/>
+          <a:p>
+            <a:pPr indent="0" marL="0">
+              <a:buNone/>
+            </a:pPr>
+            <a:r>
+              <a:rPr lang="en-US" sz="1250" dirty="0">
+                <a:solidFill>
+                  <a:srgbClr val="6E6A85"/>
+                </a:solidFill>
+                <a:latin typeface="맑은 고딕" pitchFamily="34" charset="0"/>
+                <a:ea typeface="맑은 고딕" pitchFamily="34" charset="-122"/>
+                <a:cs typeface="맑은 고딕" pitchFamily="34" charset="-120"/>
+              </a:rPr>
+              <a:t>일정 간격으로 표본을 뽑아(샘플링) 숫자로 저장한다.</a:t>
+            </a:r>
+            <a:endParaRPr lang="en-US" sz="1250" dirty="0"/>
+          </a:p>
+        </p:txBody>
+      </p:sp>
+      <p:sp>
+        <p:nvSpPr>
+          <p:cNvPr id="12" name="Shape 10"/>
+          <p:cNvSpPr/>
+          <p:nvPr/>
+        </p:nvSpPr>
+        <p:spPr>
+          <a:xfrm>
+            <a:off x="566928" y="3355848"/>
+            <a:ext cx="402336" cy="402336"/>
+          </a:xfrm>
+          <a:prstGeom prst="ellipse">
+            <a:avLst/>
+          </a:prstGeom>
+          <a:solidFill>
+            <a:srgbClr val="4A3F9E"/>
+          </a:solidFill>
+          <a:ln/>
+        </p:spPr>
+      </p:sp>
+      <p:sp>
+        <p:nvSpPr>
+          <p:cNvPr id="13" name="Text 11"/>
+          <p:cNvSpPr/>
+          <p:nvPr/>
+        </p:nvSpPr>
+        <p:spPr>
+          <a:xfrm>
+            <a:off x="566928" y="3355848"/>
+            <a:ext cx="402336" cy="402336"/>
+          </a:xfrm>
+          <a:prstGeom prst="rect">
+            <a:avLst/>
+          </a:prstGeom>
+          <a:noFill/>
+          <a:ln/>
+        </p:spPr>
+        <p:txBody>
+          <a:bodyPr wrap="square" lIns="0" tIns="0" rIns="0" bIns="0" rtlCol="0" anchor="ctr"/>
+          <a:lstStyle/>
+          <a:p>
+            <a:pPr algn="ctr" indent="0" marL="0">
+              <a:buNone/>
+            </a:pPr>
+            <a:r>
+              <a:rPr lang="en-US" sz="1150" b="1" dirty="0">
+                <a:solidFill>
+                  <a:srgbClr val="FFFFFF"/>
+                </a:solidFill>
+                <a:latin typeface="맑은 고딕" pitchFamily="34" charset="0"/>
+                <a:ea typeface="맑은 고딕" pitchFamily="34" charset="-122"/>
+                <a:cs typeface="맑은 고딕" pitchFamily="34" charset="-120"/>
+              </a:rPr>
+              <a:t>03</a:t>
+            </a:r>
+            <a:endParaRPr lang="en-US" sz="1150" dirty="0"/>
+          </a:p>
+        </p:txBody>
+      </p:sp>
+      <p:sp>
+        <p:nvSpPr>
+          <p:cNvPr id="14" name="Text 12"/>
+          <p:cNvSpPr/>
+          <p:nvPr/>
+        </p:nvSpPr>
+        <p:spPr>
+          <a:xfrm>
+            <a:off x="1115568" y="3300984"/>
+            <a:ext cx="3566160" cy="292608"/>
+          </a:xfrm>
+          <a:prstGeom prst="rect">
+            <a:avLst/>
+          </a:prstGeom>
+          <a:noFill/>
+          <a:ln/>
+        </p:spPr>
+        <p:txBody>
+          <a:bodyPr wrap="square" lIns="0" tIns="0" rIns="0" bIns="0" rtlCol="0" anchor="ctr"/>
+          <a:lstStyle/>
+          <a:p>
+            <a:pPr indent="0" marL="0">
+              <a:buNone/>
+            </a:pPr>
+            <a:r>
+              <a:rPr lang="en-US" sz="1500" b="1" dirty="0">
+                <a:solidFill>
+                  <a:srgbClr val="241C4D"/>
+                </a:solidFill>
+                <a:latin typeface="맑은 고딕" pitchFamily="34" charset="0"/>
+                <a:ea typeface="맑은 고딕" pitchFamily="34" charset="-122"/>
+                <a:cs typeface="맑은 고딕" pitchFamily="34" charset="-120"/>
+              </a:rPr>
+              <a:t>데이터 → 인공지능 학습</a:t>
+            </a:r>
+            <a:endParaRPr lang="en-US" sz="1500" dirty="0"/>
+          </a:p>
+        </p:txBody>
+      </p:sp>
+      <p:sp>
+        <p:nvSpPr>
+          <p:cNvPr id="15" name="Text 13"/>
+          <p:cNvSpPr/>
+          <p:nvPr/>
+        </p:nvSpPr>
+        <p:spPr>
+          <a:xfrm>
+            <a:off x="1115568" y="3611880"/>
+            <a:ext cx="4023360" cy="502920"/>
+          </a:xfrm>
+          <a:prstGeom prst="rect">
+            <a:avLst/>
+          </a:prstGeom>
+          <a:noFill/>
+          <a:ln/>
+        </p:spPr>
+        <p:txBody>
+          <a:bodyPr wrap="square" lIns="0" tIns="0" rIns="0" bIns="0" rtlCol="0" anchor="ctr"/>
+          <a:lstStyle/>
+          <a:p>
+            <a:pPr indent="0" marL="0">
+              <a:buNone/>
+            </a:pPr>
+            <a:r>
+              <a:rPr lang="en-US" sz="1250" dirty="0">
+                <a:solidFill>
+                  <a:srgbClr val="6E6A85"/>
+                </a:solidFill>
+                <a:latin typeface="맑은 고딕" pitchFamily="34" charset="0"/>
+                <a:ea typeface="맑은 고딕" pitchFamily="34" charset="-122"/>
+                <a:cs typeface="맑은 고딕" pitchFamily="34" charset="-120"/>
+              </a:rPr>
+              <a:t>숫자로 바뀐 소리를 모아 분류해야 AI가 소리를 구분한다.</a:t>
+            </a:r>
+            <a:endParaRPr lang="en-US" sz="1250" dirty="0"/>
+          </a:p>
+        </p:txBody>
+      </p:sp>
+      <p:pic>
+        <p:nvPicPr>
+          <p:cNvPr id="16" name="Image 0" descr="preencoded.png">    </p:cNvPr>
+          <p:cNvPicPr>
+            <a:picLocks noChangeAspect="1"/>
+          </p:cNvPicPr>
+          <p:nvPr/>
+        </p:nvPicPr>
+        <p:blipFill>
+          <a:blip r:embed="rId1"/>
+          <a:stretch>
+            <a:fillRect/>
+          </a:stretch>
+        </p:blipFill>
+        <p:spPr>
+          <a:xfrm>
+            <a:off x="5349240" y="1371600"/>
+            <a:ext cx="3246120" cy="1828800"/>
+          </a:xfrm>
+          <a:prstGeom prst="rect">
+            <a:avLst/>
+          </a:prstGeom>
+        </p:spPr>
+      </p:pic>
+      <p:sp>
+        <p:nvSpPr>
+          <p:cNvPr id="17" name="Text 14"/>
+          <p:cNvSpPr/>
+          <p:nvPr/>
+        </p:nvSpPr>
+        <p:spPr>
+          <a:xfrm>
+            <a:off x="5349240" y="3246120"/>
+            <a:ext cx="3246120" cy="274320"/>
+          </a:xfrm>
+          <a:prstGeom prst="rect">
+            <a:avLst/>
+          </a:prstGeom>
+          <a:noFill/>
+          <a:ln/>
+        </p:spPr>
+        <p:txBody>
+          <a:bodyPr wrap="square" lIns="0" tIns="0" rIns="0" bIns="0" rtlCol="0" anchor="ctr"/>
+          <a:lstStyle/>
+          <a:p>
+            <a:pPr indent="0" marL="0">
+              <a:buNone/>
+            </a:pPr>
+            <a:r>
+              <a:rPr lang="en-US" sz="1050" dirty="0">
+                <a:solidFill>
+                  <a:srgbClr val="6E6A85"/>
+                </a:solidFill>
+                <a:latin typeface="맑은 고딕" pitchFamily="34" charset="0"/>
+                <a:ea typeface="맑은 고딕" pitchFamily="34" charset="-122"/>
+                <a:cs typeface="맑은 고딕" pitchFamily="34" charset="-120"/>
+              </a:rPr>
+              <a:t>▲ 자료 화면 : 마이크의 전류 흐름을 디지털 신호로 변환</a:t>
+            </a:r>
+            <a:endParaRPr lang="en-US" sz="1050" dirty="0"/>
+          </a:p>
+        </p:txBody>
+      </p:sp>
+      <p:sp>
+        <p:nvSpPr>
+          <p:cNvPr id="18" name="Shape 15"/>
+          <p:cNvSpPr/>
+          <p:nvPr/>
+        </p:nvSpPr>
+        <p:spPr>
+          <a:xfrm>
+            <a:off x="548640" y="4315968"/>
+            <a:ext cx="8046720" cy="502920"/>
+          </a:xfrm>
+          <a:prstGeom prst="roundRect">
+            <a:avLst>
+              <a:gd name="adj" fmla="val 18182"/>
+            </a:avLst>
+          </a:prstGeom>
+          <a:solidFill>
+            <a:srgbClr val="EEEBFA"/>
+          </a:solidFill>
+          <a:ln/>
+        </p:spPr>
+      </p:sp>
+      <p:sp>
+        <p:nvSpPr>
+          <p:cNvPr id="19" name="Text 16"/>
+          <p:cNvSpPr/>
+          <p:nvPr/>
+        </p:nvSpPr>
+        <p:spPr>
+          <a:xfrm>
+            <a:off x="777240" y="4315968"/>
+            <a:ext cx="7589520" cy="502920"/>
+          </a:xfrm>
+          <a:prstGeom prst="rect">
+            <a:avLst/>
+          </a:prstGeom>
+          <a:noFill/>
+          <a:ln/>
+        </p:spPr>
+        <p:txBody>
+          <a:bodyPr wrap="square" lIns="0" tIns="0" rIns="0" bIns="0" rtlCol="0" anchor="ctr"/>
+          <a:lstStyle/>
+          <a:p>
+            <a:pPr indent="0" marL="0">
+              <a:buNone/>
+            </a:pPr>
+            <a:r>
+              <a:rPr lang="en-US" sz="1150" b="1" dirty="0">
+                <a:solidFill>
+                  <a:srgbClr val="4A3F9E"/>
+                </a:solidFill>
+                <a:latin typeface="맑은 고딕" pitchFamily="34" charset="0"/>
+                <a:ea typeface="맑은 고딕" pitchFamily="34" charset="-122"/>
+                <a:cs typeface="맑은 고딕" pitchFamily="34" charset="-120"/>
+              </a:rPr>
+              <a:t>자료 바로가기  </a:t>
+            </a:r>
+            <a:pPr indent="0" marL="0">
+              <a:buNone/>
+            </a:pPr>
+            <a:r>
+              <a:rPr lang="en-US" sz="1150" u="sng" dirty="0">
+                <a:solidFill>
+                  <a:srgbClr val="1B4CD8"/>
+                </a:solidFill>
+                <a:latin typeface="맑은 고딕" pitchFamily="34" charset="0"/>
+                <a:ea typeface="맑은 고딕" pitchFamily="34" charset="-122"/>
+                <a:cs typeface="맑은 고딕" pitchFamily="34" charset="-120"/>
+                <a:hlinkClick r:id="rId2" invalidUrl="" action="" tgtFrame="" tooltip="[3-1] 인공지능 소리인식의 원리" history="1" highlightClick="0" endSnd="0">
                   <a:extLst>
                     <a:ext uri="{A12FA001-AC4F-418D-AE19-62706E023703}">
                       <ahyp:hlinkClr xmlns:ahyp="http://schemas.microsoft.com/office/drawing/2018/hyperlinkcolor" val="tx"/>
@@ -1939,9 +3275,9 @@
                   </a:extLst>
                 </a:hlinkClick>
               </a:rPr>
-              <a:t>🔗 자료 열기: [2-2] ���� ������ ������</a:t>
-            </a:r>
-            <a:endParaRPr lang="en-US" sz="1400" dirty="0"/>
+              <a:t>https://sai.software.kr/_static/contents/2023middle/video.html?url=03/01</a:t>
+            </a:r>
+            <a:endParaRPr lang="en-US" sz="1150" dirty="0"/>
           </a:p>
         </p:txBody>
       </p:sp>
@@ -1956,6 +3292,13 @@
 <file path=ppt/slides/slide5.xml><?xml version="1.0" encoding="utf-8"?>
 <p:sld xmlns:a="http://schemas.openxmlformats.org/drawingml/2006/main" xmlns:r="http://schemas.openxmlformats.org/officeDocument/2006/relationships" xmlns:p="http://schemas.openxmlformats.org/presentationml/2006/main">
   <p:cSld name="Slide 5">
+    <p:bg>
+      <p:bgPr>
+        <a:solidFill>
+          <a:srgbClr val="241C4D"/>
+        </a:solidFill>
+      </p:bgPr>
+    </p:bg>
     <p:spTree>
       <p:nvGrpSpPr>
         <p:cNvPr id="1" name=""/>
@@ -1972,14 +3315,34 @@
       </p:grpSpPr>
       <p:sp>
         <p:nvSpPr>
-          <p:cNvPr id="2" name="Text 0"/>
-          <p:cNvSpPr/>
-          <p:nvPr/>
-        </p:nvSpPr>
-        <p:spPr>
-          <a:xfrm>
-            <a:off x="457200" y="320040"/>
-            <a:ext cx="11274552" cy="822960"/>
+          <p:cNvPr id="2" name="Shape 0"/>
+          <p:cNvSpPr/>
+          <p:nvPr/>
+        </p:nvSpPr>
+        <p:spPr>
+          <a:xfrm>
+            <a:off x="-914400" y="3657600"/>
+            <a:ext cx="2560320" cy="2560320"/>
+          </a:xfrm>
+          <a:prstGeom prst="ellipse">
+            <a:avLst/>
+          </a:prstGeom>
+          <a:solidFill>
+            <a:srgbClr val="4A3F9E"/>
+          </a:solidFill>
+          <a:ln/>
+        </p:spPr>
+      </p:sp>
+      <p:sp>
+        <p:nvSpPr>
+          <p:cNvPr id="3" name="Text 1"/>
+          <p:cNvSpPr/>
+          <p:nvPr/>
+        </p:nvSpPr>
+        <p:spPr>
+          <a:xfrm>
+            <a:off x="548640" y="347472"/>
+            <a:ext cx="8046720" cy="640080"/>
           </a:xfrm>
           <a:prstGeom prst="rect">
             <a:avLst/>
@@ -1988,34 +3351,98 @@
           <a:ln/>
         </p:spPr>
         <p:txBody>
-          <a:bodyPr wrap="square" rtlCol="0" anchor="ctr"/>
+          <a:bodyPr wrap="square" lIns="0" tIns="0" rIns="0" bIns="0" rtlCol="0" anchor="ctr"/>
+          <a:lstStyle/>
+          <a:p>
+            <a:pPr algn="l" indent="0" marL="0">
+              <a:buNone/>
+            </a:pPr>
+            <a:r>
+              <a:rPr lang="en-US" sz="2800" b="1" dirty="0">
+                <a:solidFill>
+                  <a:srgbClr val="FFFFFF"/>
+                </a:solidFill>
+                <a:latin typeface="맑은 고딕" pitchFamily="34" charset="0"/>
+                <a:ea typeface="맑은 고딕" pitchFamily="34" charset="-122"/>
+                <a:cs typeface="맑은 고딕" pitchFamily="34" charset="-120"/>
+              </a:rPr>
+              <a:t>마무리 — 오늘 꼭 기억할 것</a:t>
+            </a:r>
+            <a:endParaRPr lang="en-US" sz="2800" dirty="0"/>
+          </a:p>
+        </p:txBody>
+      </p:sp>
+      <p:sp>
+        <p:nvSpPr>
+          <p:cNvPr id="4" name="Shape 2"/>
+          <p:cNvSpPr/>
+          <p:nvPr/>
+        </p:nvSpPr>
+        <p:spPr>
+          <a:xfrm>
+            <a:off x="548640" y="1234440"/>
+            <a:ext cx="8046720" cy="914400"/>
+          </a:xfrm>
+          <a:prstGeom prst="roundRect">
+            <a:avLst>
+              <a:gd name="adj" fmla="val 12000"/>
+            </a:avLst>
+          </a:prstGeom>
+          <a:solidFill>
+            <a:srgbClr val="332A63"/>
+          </a:solidFill>
+          <a:ln/>
+        </p:spPr>
+      </p:sp>
+      <p:sp>
+        <p:nvSpPr>
+          <p:cNvPr id="5" name="Text 3"/>
+          <p:cNvSpPr/>
+          <p:nvPr/>
+        </p:nvSpPr>
+        <p:spPr>
+          <a:xfrm>
+            <a:off x="868680" y="1353312"/>
+            <a:ext cx="7406640" cy="310896"/>
+          </a:xfrm>
+          <a:prstGeom prst="rect">
+            <a:avLst/>
+          </a:prstGeom>
+          <a:noFill/>
+          <a:ln/>
+        </p:spPr>
+        <p:txBody>
+          <a:bodyPr wrap="square" lIns="0" tIns="0" rIns="0" bIns="0" rtlCol="0" anchor="ctr"/>
           <a:lstStyle/>
           <a:p>
             <a:pPr indent="0" marL="0">
               <a:buNone/>
             </a:pPr>
             <a:r>
-              <a:rPr lang="en-US" sz="2600" b="1" dirty="0">
-                <a:solidFill>
-                  <a:srgbClr val="D97706"/>
-                </a:solidFill>
-              </a:rPr>
-              <a:t>[활동 2] 글의 정보 및 내용 시각화</a:t>
-            </a:r>
-            <a:endParaRPr lang="en-US" sz="2600" dirty="0"/>
-          </a:p>
-        </p:txBody>
-      </p:sp>
-      <p:sp>
-        <p:nvSpPr>
-          <p:cNvPr id="3" name="Text 1"/>
-          <p:cNvSpPr/>
-          <p:nvPr/>
-        </p:nvSpPr>
-        <p:spPr>
-          <a:xfrm>
-            <a:off x="822960" y="1645920"/>
-            <a:ext cx="10543032" cy="3931920"/>
+              <a:rPr lang="en-US" sz="1600" b="1" dirty="0">
+                <a:solidFill>
+                  <a:srgbClr val="F5B400"/>
+                </a:solidFill>
+                <a:latin typeface="맑은 고딕" pitchFamily="34" charset="0"/>
+                <a:ea typeface="맑은 고딕" pitchFamily="34" charset="-122"/>
+                <a:cs typeface="맑은 고딕" pitchFamily="34" charset="-120"/>
+              </a:rPr>
+              <a:t>소리도 데이터다</a:t>
+            </a:r>
+            <a:endParaRPr lang="en-US" sz="1600" dirty="0"/>
+          </a:p>
+        </p:txBody>
+      </p:sp>
+      <p:sp>
+        <p:nvSpPr>
+          <p:cNvPr id="6" name="Text 4"/>
+          <p:cNvSpPr/>
+          <p:nvPr/>
+        </p:nvSpPr>
+        <p:spPr>
+          <a:xfrm>
+            <a:off x="868680" y="1691640"/>
+            <a:ext cx="7406640" cy="329184"/>
           </a:xfrm>
           <a:prstGeom prst="rect">
             <a:avLst/>
@@ -2024,142 +3451,59 @@
           <a:ln/>
         </p:spPr>
         <p:txBody>
-          <a:bodyPr wrap="square" rtlCol="0" anchor="ctr"/>
-          <a:lstStyle/>
-          <a:p>
-            <a:pPr marL="342900" indent="-342900">
-              <a:lnSpc>
-                <a:spcPct val="125000"/>
-              </a:lnSpc>
-              <a:buSzPct val="100000"/>
-              <a:buChar char="•"/>
-            </a:pPr>
-            <a:r>
-              <a:rPr lang="en-US" sz="2000" dirty="0">
-                <a:solidFill>
-                  <a:srgbClr val="000000"/>
-                </a:solidFill>
-              </a:rPr>
-              <a:t>글의 핵심 정보와 세부 내용 구분 및 분류</a:t>
-            </a:r>
-            <a:endParaRPr lang="en-US" sz="2000" dirty="0"/>
-          </a:p>
-          <a:p>
-            <a:pPr marL="342900" indent="-342900">
-              <a:lnSpc>
-                <a:spcPct val="125000"/>
-              </a:lnSpc>
-              <a:buSzPct val="100000"/>
-              <a:buChar char="•"/>
-            </a:pPr>
-            <a:r>
-              <a:rPr lang="en-US" sz="2000" dirty="0">
-                <a:solidFill>
-                  <a:srgbClr val="000000"/>
-                </a:solidFill>
-              </a:rPr>
-              <a:t>마인드맵, 비교 표, 개념도 등을 활용한 정보 구조화</a:t>
-            </a:r>
-            <a:endParaRPr lang="en-US" sz="2000" dirty="0"/>
-          </a:p>
-          <a:p>
-            <a:pPr marL="342900" indent="-342900">
-              <a:lnSpc>
-                <a:spcPct val="125000"/>
-              </a:lnSpc>
-              <a:buSzPct val="100000"/>
-              <a:buChar char="•"/>
-            </a:pPr>
-            <a:r>
-              <a:rPr lang="en-US" sz="2000" dirty="0">
-                <a:solidFill>
-                  <a:srgbClr val="000000"/>
-                </a:solidFill>
-              </a:rPr>
-              <a:t>시각적 자료 생성을 통해 글의 전체적인 흐름 한눈에 파악</a:t>
-            </a:r>
-            <a:endParaRPr lang="en-US" sz="2000" dirty="0"/>
-          </a:p>
-        </p:txBody>
-      </p:sp>
-      <p:sp>
-        <p:nvSpPr>
-          <p:cNvPr id="4" name="Text 2"/>
-          <p:cNvSpPr/>
-          <p:nvPr/>
-        </p:nvSpPr>
-        <p:spPr>
-          <a:xfrm>
-            <a:off x="822960" y="6126480"/>
-            <a:ext cx="10543032" cy="457200"/>
-          </a:xfrm>
-          <a:prstGeom prst="rect">
-            <a:avLst/>
-          </a:prstGeom>
-          <a:noFill/>
-          <a:ln/>
-        </p:spPr>
-        <p:txBody>
-          <a:bodyPr wrap="square" rtlCol="0" anchor="ctr"/>
+          <a:bodyPr wrap="square" lIns="0" tIns="0" rIns="0" bIns="0" rtlCol="0" anchor="ctr"/>
           <a:lstStyle/>
           <a:p>
             <a:pPr indent="0" marL="0">
               <a:buNone/>
             </a:pPr>
             <a:r>
-              <a:rPr lang="en-US" sz="1400" u="sng" dirty="0">
-                <a:solidFill>
-                  <a:srgbClr val="1155CC"/>
-                </a:solidFill>
-                <a:hlinkClick r:id="rId1" invalidUrl="" action="" tgtFrame="" tooltip="" history="1" highlightClick="0" endSnd="0">
-                  <a:extLst>
-                    <a:ext uri="{A12FA001-AC4F-418D-AE19-62706E023703}">
-                      <ahyp:hlinkClr xmlns:ahyp="http://schemas.microsoft.com/office/drawing/2018/hyperlinkcolor" val="tx"/>
-                    </a:ext>
-                  </a:extLst>
-                </a:hlinkClick>
-              </a:rPr>
-              <a:t>🔗 자료 열기: [2-7] �Ĺ� ���� ������ �ð�ȭ�ϱ�</a:t>
-            </a:r>
-            <a:endParaRPr lang="en-US" sz="1400" dirty="0"/>
-          </a:p>
-        </p:txBody>
-      </p:sp>
-    </p:spTree>
-  </p:cSld>
-  <p:clrMapOvr>
-    <a:masterClrMapping/>
-  </p:clrMapOvr>
-</p:sld>
-</file>
-
-<file path=ppt/slides/slide6.xml><?xml version="1.0" encoding="utf-8"?>
-<p:sld xmlns:a="http://schemas.openxmlformats.org/drawingml/2006/main" xmlns:r="http://schemas.openxmlformats.org/officeDocument/2006/relationships" xmlns:p="http://schemas.openxmlformats.org/presentationml/2006/main">
-  <p:cSld name="Slide 6">
-    <p:spTree>
-      <p:nvGrpSpPr>
-        <p:cNvPr id="1" name=""/>
-        <p:cNvGrpSpPr/>
-        <p:nvPr/>
-      </p:nvGrpSpPr>
-      <p:grpSpPr>
-        <a:xfrm>
-          <a:off x="0" y="0"/>
-          <a:ext cx="0" cy="0"/>
-          <a:chOff x="0" y="0"/>
-          <a:chExt cx="0" cy="0"/>
-        </a:xfrm>
-      </p:grpSpPr>
-      <p:sp>
-        <p:nvSpPr>
-          <p:cNvPr id="2" name="Text 0"/>
-          <p:cNvSpPr/>
-          <p:nvPr/>
-        </p:nvSpPr>
-        <p:spPr>
-          <a:xfrm>
-            <a:off x="457200" y="320040"/>
-            <a:ext cx="11274552" cy="822960"/>
+              <a:rPr lang="en-US" sz="1300" dirty="0">
+                <a:solidFill>
+                  <a:srgbClr val="E2DEF5"/>
+                </a:solidFill>
+                <a:latin typeface="맑은 고딕" pitchFamily="34" charset="0"/>
+                <a:ea typeface="맑은 고딕" pitchFamily="34" charset="-122"/>
+                <a:cs typeface="맑은 고딕" pitchFamily="34" charset="-120"/>
+              </a:rPr>
+              <a:t>귀에 들리는 모든 소리는 숫자로 바꿔 저장할 수 있다. (9정02-01)</a:t>
+            </a:r>
+            <a:endParaRPr lang="en-US" sz="1300" dirty="0"/>
+          </a:p>
+        </p:txBody>
+      </p:sp>
+      <p:sp>
+        <p:nvSpPr>
+          <p:cNvPr id="7" name="Shape 5"/>
+          <p:cNvSpPr/>
+          <p:nvPr/>
+        </p:nvSpPr>
+        <p:spPr>
+          <a:xfrm>
+            <a:off x="548640" y="2286000"/>
+            <a:ext cx="8046720" cy="914400"/>
+          </a:xfrm>
+          <a:prstGeom prst="roundRect">
+            <a:avLst>
+              <a:gd name="adj" fmla="val 12000"/>
+            </a:avLst>
+          </a:prstGeom>
+          <a:solidFill>
+            <a:srgbClr val="332A63"/>
+          </a:solidFill>
+          <a:ln/>
+        </p:spPr>
+      </p:sp>
+      <p:sp>
+        <p:nvSpPr>
+          <p:cNvPr id="8" name="Text 6"/>
+          <p:cNvSpPr/>
+          <p:nvPr/>
+        </p:nvSpPr>
+        <p:spPr>
+          <a:xfrm>
+            <a:off x="868680" y="2404872"/>
+            <a:ext cx="7406640" cy="310896"/>
           </a:xfrm>
           <a:prstGeom prst="rect">
             <a:avLst/>
@@ -2168,34 +3512,37 @@
           <a:ln/>
         </p:spPr>
         <p:txBody>
-          <a:bodyPr wrap="square" rtlCol="0" anchor="ctr"/>
+          <a:bodyPr wrap="square" lIns="0" tIns="0" rIns="0" bIns="0" rtlCol="0" anchor="ctr"/>
           <a:lstStyle/>
           <a:p>
             <a:pPr indent="0" marL="0">
               <a:buNone/>
             </a:pPr>
             <a:r>
-              <a:rPr lang="en-US" sz="2600" b="1" dirty="0">
-                <a:solidFill>
-                  <a:srgbClr val="D97706"/>
-                </a:solidFill>
-              </a:rPr>
-              <a:t>[활동 3] 글의 의미 및 주제 깊이 있게 해석하기</a:t>
-            </a:r>
-            <a:endParaRPr lang="en-US" sz="2600" dirty="0"/>
-          </a:p>
-        </p:txBody>
-      </p:sp>
-      <p:sp>
-        <p:nvSpPr>
-          <p:cNvPr id="3" name="Text 1"/>
-          <p:cNvSpPr/>
-          <p:nvPr/>
-        </p:nvSpPr>
-        <p:spPr>
-          <a:xfrm>
-            <a:off x="822960" y="1645920"/>
-            <a:ext cx="10543032" cy="3931920"/>
+              <a:rPr lang="en-US" sz="1600" b="1" dirty="0">
+                <a:solidFill>
+                  <a:srgbClr val="F5B400"/>
+                </a:solidFill>
+                <a:latin typeface="맑은 고딕" pitchFamily="34" charset="0"/>
+                <a:ea typeface="맑은 고딕" pitchFamily="34" charset="-122"/>
+                <a:cs typeface="맑은 고딕" pitchFamily="34" charset="-120"/>
+              </a:rPr>
+              <a:t>데이터의 품질이 곧 AI의 실력</a:t>
+            </a:r>
+            <a:endParaRPr lang="en-US" sz="1600" dirty="0"/>
+          </a:p>
+        </p:txBody>
+      </p:sp>
+      <p:sp>
+        <p:nvSpPr>
+          <p:cNvPr id="9" name="Text 7"/>
+          <p:cNvSpPr/>
+          <p:nvPr/>
+        </p:nvSpPr>
+        <p:spPr>
+          <a:xfrm>
+            <a:off x="868680" y="2743200"/>
+            <a:ext cx="7406640" cy="329184"/>
           </a:xfrm>
           <a:prstGeom prst="rect">
             <a:avLst/>
@@ -2204,142 +3551,59 @@
           <a:ln/>
         </p:spPr>
         <p:txBody>
-          <a:bodyPr wrap="square" rtlCol="0" anchor="ctr"/>
-          <a:lstStyle/>
-          <a:p>
-            <a:pPr marL="342900" indent="-342900">
-              <a:lnSpc>
-                <a:spcPct val="125000"/>
-              </a:lnSpc>
-              <a:buSzPct val="100000"/>
-              <a:buChar char="•"/>
-            </a:pPr>
-            <a:r>
-              <a:rPr lang="en-US" sz="2000" dirty="0">
-                <a:solidFill>
-                  <a:srgbClr val="000000"/>
-                </a:solidFill>
-              </a:rPr>
-              <a:t>글쓴이의 관점, 의도, 태도를 추론하며 읽기</a:t>
-            </a:r>
-            <a:endParaRPr lang="en-US" sz="2000" dirty="0"/>
-          </a:p>
-          <a:p>
-            <a:pPr marL="342900" indent="-342900">
-              <a:lnSpc>
-                <a:spcPct val="125000"/>
-              </a:lnSpc>
-              <a:buSzPct val="100000"/>
-              <a:buChar char="•"/>
-            </a:pPr>
-            <a:r>
-              <a:rPr lang="en-US" sz="2000" dirty="0">
-                <a:solidFill>
-                  <a:srgbClr val="000000"/>
-                </a:solidFill>
-              </a:rPr>
-              <a:t>사회·문화적 맥락을 고려한 글의 implicit 의미 해석</a:t>
-            </a:r>
-            <a:endParaRPr lang="en-US" sz="2000" dirty="0"/>
-          </a:p>
-          <a:p>
-            <a:pPr marL="342900" indent="-342900">
-              <a:lnSpc>
-                <a:spcPct val="125000"/>
-              </a:lnSpc>
-              <a:buSzPct val="100000"/>
-              <a:buChar char="•"/>
-            </a:pPr>
-            <a:r>
-              <a:rPr lang="en-US" sz="2000" dirty="0">
-                <a:solidFill>
-                  <a:srgbClr val="000000"/>
-                </a:solidFill>
-              </a:rPr>
-              <a:t>읽은 내용을 바탕으로 비판적 사고 및 나의 견해 정리</a:t>
-            </a:r>
-            <a:endParaRPr lang="en-US" sz="2000" dirty="0"/>
-          </a:p>
-        </p:txBody>
-      </p:sp>
-      <p:sp>
-        <p:nvSpPr>
-          <p:cNvPr id="4" name="Text 2"/>
-          <p:cNvSpPr/>
-          <p:nvPr/>
-        </p:nvSpPr>
-        <p:spPr>
-          <a:xfrm>
-            <a:off x="822960" y="6126480"/>
-            <a:ext cx="10543032" cy="457200"/>
-          </a:xfrm>
-          <a:prstGeom prst="rect">
-            <a:avLst/>
-          </a:prstGeom>
-          <a:noFill/>
-          <a:ln/>
-        </p:spPr>
-        <p:txBody>
-          <a:bodyPr wrap="square" rtlCol="0" anchor="ctr"/>
+          <a:bodyPr wrap="square" lIns="0" tIns="0" rIns="0" bIns="0" rtlCol="0" anchor="ctr"/>
           <a:lstStyle/>
           <a:p>
             <a:pPr indent="0" marL="0">
               <a:buNone/>
             </a:pPr>
             <a:r>
-              <a:rPr lang="en-US" sz="1400" u="sng" dirty="0">
-                <a:solidFill>
-                  <a:srgbClr val="1155CC"/>
-                </a:solidFill>
-                <a:hlinkClick r:id="rId1" invalidUrl="" action="" tgtFrame="" tooltip="" history="1" highlightClick="0" endSnd="0">
-                  <a:extLst>
-                    <a:ext uri="{A12FA001-AC4F-418D-AE19-62706E023703}">
-                      <ahyp:hlinkClr xmlns:ahyp="http://schemas.microsoft.com/office/drawing/2018/hyperlinkcolor" val="tx"/>
-                    </a:ext>
-                  </a:extLst>
-                </a:hlinkClick>
-              </a:rPr>
-              <a:t>🔗 자료 열기: [2-8] �Ĺ� ���� ������ �ؼ��ϱ�</a:t>
-            </a:r>
-            <a:endParaRPr lang="en-US" sz="1400" dirty="0"/>
-          </a:p>
-        </p:txBody>
-      </p:sp>
-    </p:spTree>
-  </p:cSld>
-  <p:clrMapOvr>
-    <a:masterClrMapping/>
-  </p:clrMapOvr>
-</p:sld>
-</file>
-
-<file path=ppt/slides/slide7.xml><?xml version="1.0" encoding="utf-8"?>
-<p:sld xmlns:a="http://schemas.openxmlformats.org/drawingml/2006/main" xmlns:r="http://schemas.openxmlformats.org/officeDocument/2006/relationships" xmlns:p="http://schemas.openxmlformats.org/presentationml/2006/main">
-  <p:cSld name="Slide 7">
-    <p:spTree>
-      <p:nvGrpSpPr>
-        <p:cNvPr id="1" name=""/>
-        <p:cNvGrpSpPr/>
-        <p:nvPr/>
-      </p:nvGrpSpPr>
-      <p:grpSpPr>
-        <a:xfrm>
-          <a:off x="0" y="0"/>
-          <a:ext cx="0" cy="0"/>
-          <a:chOff x="0" y="0"/>
-          <a:chExt cx="0" cy="0"/>
-        </a:xfrm>
-      </p:grpSpPr>
-      <p:sp>
-        <p:nvSpPr>
-          <p:cNvPr id="2" name="Text 0"/>
-          <p:cNvSpPr/>
-          <p:nvPr/>
-        </p:nvSpPr>
-        <p:spPr>
-          <a:xfrm>
-            <a:off x="457200" y="320040"/>
-            <a:ext cx="11274552" cy="822960"/>
+              <a:rPr lang="en-US" sz="1300" dirty="0">
+                <a:solidFill>
+                  <a:srgbClr val="E2DEF5"/>
+                </a:solidFill>
+                <a:latin typeface="맑은 고딕" pitchFamily="34" charset="0"/>
+                <a:ea typeface="맑은 고딕" pitchFamily="34" charset="-122"/>
+                <a:cs typeface="맑은 고딕" pitchFamily="34" charset="-120"/>
+              </a:rPr>
+              <a:t>잘 모으고 잘 분류한 데이터라야 AI가 소리를 정확히 구분한다. (9정04-02)</a:t>
+            </a:r>
+            <a:endParaRPr lang="en-US" sz="1300" dirty="0"/>
+          </a:p>
+        </p:txBody>
+      </p:sp>
+      <p:sp>
+        <p:nvSpPr>
+          <p:cNvPr id="10" name="Shape 8"/>
+          <p:cNvSpPr/>
+          <p:nvPr/>
+        </p:nvSpPr>
+        <p:spPr>
+          <a:xfrm>
+            <a:off x="548640" y="3337560"/>
+            <a:ext cx="8046720" cy="914400"/>
+          </a:xfrm>
+          <a:prstGeom prst="roundRect">
+            <a:avLst>
+              <a:gd name="adj" fmla="val 12000"/>
+            </a:avLst>
+          </a:prstGeom>
+          <a:solidFill>
+            <a:srgbClr val="332A63"/>
+          </a:solidFill>
+          <a:ln/>
+        </p:spPr>
+      </p:sp>
+      <p:sp>
+        <p:nvSpPr>
+          <p:cNvPr id="11" name="Text 9"/>
+          <p:cNvSpPr/>
+          <p:nvPr/>
+        </p:nvSpPr>
+        <p:spPr>
+          <a:xfrm>
+            <a:off x="868680" y="3456432"/>
+            <a:ext cx="7406640" cy="310896"/>
           </a:xfrm>
           <a:prstGeom prst="rect">
             <a:avLst/>
@@ -2348,34 +3612,37 @@
           <a:ln/>
         </p:spPr>
         <p:txBody>
-          <a:bodyPr wrap="square" rtlCol="0" anchor="ctr"/>
+          <a:bodyPr wrap="square" lIns="0" tIns="0" rIns="0" bIns="0" rtlCol="0" anchor="ctr"/>
           <a:lstStyle/>
           <a:p>
             <a:pPr indent="0" marL="0">
               <a:buNone/>
             </a:pPr>
             <a:r>
-              <a:rPr lang="en-US" sz="2600" b="1" dirty="0">
-                <a:solidFill>
-                  <a:srgbClr val="D97706"/>
-                </a:solidFill>
-              </a:rPr>
-              <a:t>학습 정리 및 종합</a:t>
-            </a:r>
-            <a:endParaRPr lang="en-US" sz="2600" dirty="0"/>
-          </a:p>
-        </p:txBody>
-      </p:sp>
-      <p:sp>
-        <p:nvSpPr>
-          <p:cNvPr id="3" name="Text 1"/>
-          <p:cNvSpPr/>
-          <p:nvPr/>
-        </p:nvSpPr>
-        <p:spPr>
-          <a:xfrm>
-            <a:off x="822960" y="1920240"/>
-            <a:ext cx="10543032" cy="3657600"/>
+              <a:rPr lang="en-US" sz="1600" b="1" dirty="0">
+                <a:solidFill>
+                  <a:srgbClr val="F5B400"/>
+                </a:solidFill>
+                <a:latin typeface="맑은 고딕" pitchFamily="34" charset="0"/>
+                <a:ea typeface="맑은 고딕" pitchFamily="34" charset="-122"/>
+                <a:cs typeface="맑은 고딕" pitchFamily="34" charset="-120"/>
+              </a:rPr>
+              <a:t>세계수를 구하는 힘</a:t>
+            </a:r>
+            <a:endParaRPr lang="en-US" sz="1600" dirty="0"/>
+          </a:p>
+        </p:txBody>
+      </p:sp>
+      <p:sp>
+        <p:nvSpPr>
+          <p:cNvPr id="12" name="Text 10"/>
+          <p:cNvSpPr/>
+          <p:nvPr/>
+        </p:nvSpPr>
+        <p:spPr>
+          <a:xfrm>
+            <a:off x="868680" y="3794760"/>
+            <a:ext cx="7406640" cy="329184"/>
           </a:xfrm>
           <a:prstGeom prst="rect">
             <a:avLst/>
@@ -2384,24 +3651,63 @@
           <a:ln/>
         </p:spPr>
         <p:txBody>
-          <a:bodyPr wrap="square" rtlCol="0" anchor="ctr"/>
+          <a:bodyPr wrap="square" lIns="0" tIns="0" rIns="0" bIns="0" rtlCol="0" anchor="ctr"/>
           <a:lstStyle/>
           <a:p>
             <a:pPr indent="0" marL="0">
-              <a:lnSpc>
-                <a:spcPct val="135000"/>
-              </a:lnSpc>
               <a:buNone/>
             </a:pPr>
             <a:r>
-              <a:rPr lang="en-US" sz="2400" b="1" dirty="0">
-                <a:solidFill>
-                  <a:srgbClr val="D97706"/>
-                </a:solidFill>
-              </a:rPr>
-              <a:t>어휘 분석, 정보 시각화, 비판적 해석의 과정을 거쳐 글을 깊이 있게 이해하고 능동적인 독서 태도를 갖출 수 있습니다.</a:t>
-            </a:r>
-            <a:endParaRPr lang="en-US" sz="2400" dirty="0"/>
+              <a:rPr lang="en-US" sz="1300" dirty="0">
+                <a:solidFill>
+                  <a:srgbClr val="E2DEF5"/>
+                </a:solidFill>
+                <a:latin typeface="맑은 고딕" pitchFamily="34" charset="0"/>
+                <a:ea typeface="맑은 고딕" pitchFamily="34" charset="-122"/>
+                <a:cs typeface="맑은 고딕" pitchFamily="34" charset="-120"/>
+              </a:rPr>
+              <a:t>숲의 소리를 데이터로 모아 분류하는 순간, 문제 해결이 시작된다.</a:t>
+            </a:r>
+            <a:endParaRPr lang="en-US" sz="1300" dirty="0"/>
+          </a:p>
+        </p:txBody>
+      </p:sp>
+      <p:sp>
+        <p:nvSpPr>
+          <p:cNvPr id="13" name="Text 11"/>
+          <p:cNvSpPr/>
+          <p:nvPr/>
+        </p:nvSpPr>
+        <p:spPr>
+          <a:xfrm>
+            <a:off x="548640" y="4434840"/>
+            <a:ext cx="8046720" cy="365760"/>
+          </a:xfrm>
+          <a:prstGeom prst="rect">
+            <a:avLst/>
+          </a:prstGeom>
+          <a:noFill/>
+          <a:ln/>
+        </p:spPr>
+        <p:txBody>
+          <a:bodyPr wrap="square" lIns="0" tIns="0" rIns="0" bIns="0" rtlCol="0" anchor="ctr"/>
+          <a:lstStyle/>
+          <a:p>
+            <a:pPr algn="ctr" indent="0" marL="0">
+              <a:buNone/>
+            </a:pPr>
+            <a:r>
+              <a:rPr lang="en-US" sz="1350" i="1" dirty="0">
+                <a:solidFill>
+                  <a:srgbClr val="B9B2E8"/>
+                </a:solidFill>
+                <a:latin typeface="맑은 고딕" pitchFamily="34" charset="0"/>
+                <a:ea typeface="맑은 고딕" pitchFamily="34" charset="-122"/>
+                <a:cs typeface="맑은 고딕" pitchFamily="34" charset="-120"/>
+              </a:rPr>
+              <a:t>“데이터를 보는 눈이, 인공지능을 다루는 힘이 됩니다.”</a:t>
+            </a:r>
+            <a:endParaRPr lang="en-US" sz="1350" dirty="0"/>
           </a:p>
         </p:txBody>
       </p:sp>
